--- a/public/fun/pack/pptx/talk/발표템플릿_43_업무보고_설날세배.pptx
+++ b/public/fun/pack/pptx/talk/발표템플릿_43_업무보고_설날세배.pptx
@@ -3286,14 +3286,6 @@
 <file path=ppt/slides/slide1.xml><?xml version="1.0" encoding="utf-8"?>
 <p:sld xmlns:a="http://schemas.openxmlformats.org/drawingml/2006/main" xmlns:p="http://schemas.openxmlformats.org/presentationml/2006/main" xmlns:r="http://schemas.openxmlformats.org/officeDocument/2006/relationships">
   <p:cSld>
-    <p:bg>
-      <p:bgPr>
-        <a:solidFill>
-          <a:srgbClr val="FFFFFF"/>
-        </a:solidFill>
-        <a:effectLst/>
-      </p:bgPr>
-    </p:bg>
     <p:spTree>
       <p:nvGrpSpPr>
         <p:cNvPr id="1" name=""/>
@@ -3301,325 +3293,30 @@
         <p:nvPr/>
       </p:nvGrpSpPr>
       <p:grpSpPr/>
-      <p:sp>
-        <p:nvSpPr>
-          <p:cNvPr id="3" name="장식"/>
-          <p:cNvSpPr/>
+      <p:pic>
+        <p:nvPicPr>
+          <p:cNvPr id="3" name="표지 그림" descr="talk-43.jpg"/>
+          <p:cNvPicPr>
+            <a:picLocks noChangeAspect="1"/>
+          </p:cNvPicPr>
           <p:nvPr/>
-        </p:nvSpPr>
-        <p:spPr>
-          <a:xfrm>
-            <a:off x="-274320" y="4251960"/>
-            <a:ext cx="12740335" cy="2743200"/>
-          </a:xfrm>
-          <a:prstGeom prst="wave">
-            <a:avLst/>
-          </a:prstGeom>
-          <a:solidFill>
-            <a:srgbClr val="F0D1D6"/>
-          </a:solidFill>
-          <a:ln>
-            <a:noFill/>
-          </a:ln>
-        </p:spPr>
-        <p:txBody>
-          <a:bodyPr rtlCol="0" anchor="ctr"/>
-          <a:lstStyle/>
-          <a:p>
-            <a:pPr algn="ctr"/>
-          </a:p>
-        </p:txBody>
-      </p:sp>
-      <p:sp>
-        <p:nvSpPr>
-          <p:cNvPr id="4" name="장식"/>
-          <p:cNvSpPr/>
-          <p:nvPr/>
-        </p:nvSpPr>
-        <p:spPr>
-          <a:xfrm>
-            <a:off x="-274320" y="5074920"/>
-            <a:ext cx="12740335" cy="2331720"/>
-          </a:xfrm>
-          <a:prstGeom prst="wave">
-            <a:avLst/>
-          </a:prstGeom>
-          <a:solidFill>
-            <a:srgbClr val="8D3443"/>
-          </a:solidFill>
-          <a:ln>
-            <a:noFill/>
-          </a:ln>
-        </p:spPr>
-        <p:txBody>
-          <a:bodyPr rtlCol="0" anchor="ctr"/>
-          <a:lstStyle/>
-          <a:p>
-            <a:pPr algn="ctr"/>
-          </a:p>
-        </p:txBody>
-      </p:sp>
-      <p:sp>
-        <p:nvSpPr>
-          <p:cNvPr id="5" name="장식"/>
-          <p:cNvSpPr/>
-          <p:nvPr/>
-        </p:nvSpPr>
-        <p:spPr>
-          <a:xfrm>
-            <a:off x="8543294" y="1234440"/>
-            <a:ext cx="822959" cy="1371600"/>
-          </a:xfrm>
-          <a:prstGeom prst="roundRect">
-            <a:avLst/>
-          </a:prstGeom>
-          <a:solidFill>
-            <a:srgbClr val="8D3443"/>
-          </a:solidFill>
-          <a:ln>
-            <a:noFill/>
-          </a:ln>
-        </p:spPr>
-        <p:txBody>
-          <a:bodyPr rtlCol="0" anchor="ctr"/>
-          <a:lstStyle/>
-          <a:p>
-            <a:pPr algn="ctr"/>
-          </a:p>
-        </p:txBody>
-      </p:sp>
-      <p:sp>
-        <p:nvSpPr>
-          <p:cNvPr id="6" name="장식"/>
-          <p:cNvSpPr/>
-          <p:nvPr/>
-        </p:nvSpPr>
-        <p:spPr>
-          <a:xfrm>
-            <a:off x="8749034" y="1097280"/>
-            <a:ext cx="411479" cy="137160"/>
+        </p:nvPicPr>
+        <p:blipFill>
+          <a:blip r:embed="rId2"/>
+          <a:stretch>
+            <a:fillRect/>
+          </a:stretch>
+        </p:blipFill>
+        <p:spPr>
+          <a:xfrm>
+            <a:off x="0" y="0"/>
+            <a:ext cx="12191695" cy="6858000"/>
           </a:xfrm>
           <a:prstGeom prst="rect">
             <a:avLst/>
           </a:prstGeom>
-          <a:solidFill>
-            <a:srgbClr val="3B9158"/>
-          </a:solidFill>
-          <a:ln>
-            <a:noFill/>
-          </a:ln>
-        </p:spPr>
-        <p:txBody>
-          <a:bodyPr rtlCol="0" anchor="ctr"/>
-          <a:lstStyle/>
-          <a:p>
-            <a:pPr algn="ctr"/>
-          </a:p>
-        </p:txBody>
-      </p:sp>
-      <p:sp>
-        <p:nvSpPr>
-          <p:cNvPr id="7" name="장식"/>
-          <p:cNvSpPr/>
-          <p:nvPr/>
-        </p:nvSpPr>
-        <p:spPr>
-          <a:xfrm>
-            <a:off x="8749034" y="2606040"/>
-            <a:ext cx="411479" cy="137160"/>
-          </a:xfrm>
-          <a:prstGeom prst="rect">
-            <a:avLst/>
-          </a:prstGeom>
-          <a:solidFill>
-            <a:srgbClr val="3B9158"/>
-          </a:solidFill>
-          <a:ln>
-            <a:noFill/>
-          </a:ln>
-        </p:spPr>
-        <p:txBody>
-          <a:bodyPr rtlCol="0" anchor="ctr"/>
-          <a:lstStyle/>
-          <a:p>
-            <a:pPr algn="ctr"/>
-          </a:p>
-        </p:txBody>
-      </p:sp>
-      <p:sp>
-        <p:nvSpPr>
-          <p:cNvPr id="8" name="장식"/>
-          <p:cNvSpPr/>
-          <p:nvPr/>
-        </p:nvSpPr>
-        <p:spPr>
-          <a:xfrm>
-            <a:off x="9585710" y="1728216"/>
-            <a:ext cx="822959" cy="1152144"/>
-          </a:xfrm>
-          <a:prstGeom prst="roundRect">
-            <a:avLst/>
-          </a:prstGeom>
-          <a:solidFill>
-            <a:srgbClr val="F0D1D6"/>
-          </a:solidFill>
-          <a:ln>
-            <a:noFill/>
-          </a:ln>
-        </p:spPr>
-        <p:txBody>
-          <a:bodyPr rtlCol="0" anchor="ctr"/>
-          <a:lstStyle/>
-          <a:p>
-            <a:pPr algn="ctr"/>
-          </a:p>
-        </p:txBody>
-      </p:sp>
-      <p:sp>
-        <p:nvSpPr>
-          <p:cNvPr id="9" name="장식"/>
-          <p:cNvSpPr/>
-          <p:nvPr/>
-        </p:nvSpPr>
-        <p:spPr>
-          <a:xfrm>
-            <a:off x="9791450" y="1591056"/>
-            <a:ext cx="411479" cy="137160"/>
-          </a:xfrm>
-          <a:prstGeom prst="rect">
-            <a:avLst/>
-          </a:prstGeom>
-          <a:solidFill>
-            <a:srgbClr val="3B9158"/>
-          </a:solidFill>
-          <a:ln>
-            <a:noFill/>
-          </a:ln>
-        </p:spPr>
-        <p:txBody>
-          <a:bodyPr rtlCol="0" anchor="ctr"/>
-          <a:lstStyle/>
-          <a:p>
-            <a:pPr algn="ctr"/>
-          </a:p>
-        </p:txBody>
-      </p:sp>
-      <p:sp>
-        <p:nvSpPr>
-          <p:cNvPr id="10" name="장식"/>
-          <p:cNvSpPr/>
-          <p:nvPr/>
-        </p:nvSpPr>
-        <p:spPr>
-          <a:xfrm>
-            <a:off x="9791450" y="2880360"/>
-            <a:ext cx="411479" cy="137160"/>
-          </a:xfrm>
-          <a:prstGeom prst="rect">
-            <a:avLst/>
-          </a:prstGeom>
-          <a:solidFill>
-            <a:srgbClr val="3B9158"/>
-          </a:solidFill>
-          <a:ln>
-            <a:noFill/>
-          </a:ln>
-        </p:spPr>
-        <p:txBody>
-          <a:bodyPr rtlCol="0" anchor="ctr"/>
-          <a:lstStyle/>
-          <a:p>
-            <a:pPr algn="ctr"/>
-          </a:p>
-        </p:txBody>
-      </p:sp>
-      <p:sp>
-        <p:nvSpPr>
-          <p:cNvPr id="11" name="장식"/>
-          <p:cNvSpPr/>
-          <p:nvPr/>
-        </p:nvSpPr>
-        <p:spPr>
-          <a:xfrm>
-            <a:off x="10628126" y="1234440"/>
-            <a:ext cx="822959" cy="1371600"/>
-          </a:xfrm>
-          <a:prstGeom prst="roundRect">
-            <a:avLst/>
-          </a:prstGeom>
-          <a:solidFill>
-            <a:srgbClr val="3B9158"/>
-          </a:solidFill>
-          <a:ln>
-            <a:noFill/>
-          </a:ln>
-        </p:spPr>
-        <p:txBody>
-          <a:bodyPr rtlCol="0" anchor="ctr"/>
-          <a:lstStyle/>
-          <a:p>
-            <a:pPr algn="ctr"/>
-          </a:p>
-        </p:txBody>
-      </p:sp>
-      <p:sp>
-        <p:nvSpPr>
-          <p:cNvPr id="12" name="장식"/>
-          <p:cNvSpPr/>
-          <p:nvPr/>
-        </p:nvSpPr>
-        <p:spPr>
-          <a:xfrm>
-            <a:off x="10833866" y="1097280"/>
-            <a:ext cx="411479" cy="137160"/>
-          </a:xfrm>
-          <a:prstGeom prst="rect">
-            <a:avLst/>
-          </a:prstGeom>
-          <a:solidFill>
-            <a:srgbClr val="8D3443"/>
-          </a:solidFill>
-          <a:ln>
-            <a:noFill/>
-          </a:ln>
-        </p:spPr>
-        <p:txBody>
-          <a:bodyPr rtlCol="0" anchor="ctr"/>
-          <a:lstStyle/>
-          <a:p>
-            <a:pPr algn="ctr"/>
-          </a:p>
-        </p:txBody>
-      </p:sp>
-      <p:sp>
-        <p:nvSpPr>
-          <p:cNvPr id="13" name="장식"/>
-          <p:cNvSpPr/>
-          <p:nvPr/>
-        </p:nvSpPr>
-        <p:spPr>
-          <a:xfrm>
-            <a:off x="10833866" y="2606040"/>
-            <a:ext cx="411479" cy="137160"/>
-          </a:xfrm>
-          <a:prstGeom prst="rect">
-            <a:avLst/>
-          </a:prstGeom>
-          <a:solidFill>
-            <a:srgbClr val="8D3443"/>
-          </a:solidFill>
-          <a:ln>
-            <a:noFill/>
-          </a:ln>
-        </p:spPr>
-        <p:txBody>
-          <a:bodyPr rtlCol="0" anchor="ctr"/>
-          <a:lstStyle/>
-          <a:p>
-            <a:pPr algn="ctr"/>
-          </a:p>
-        </p:txBody>
-      </p:sp>
+        </p:spPr>
+      </p:pic>
       <p:sp>
         <p:nvSpPr>
           <p:cNvPr id="2" name="Title 1"/>
@@ -3632,8 +3329,8 @@
         </p:nvSpPr>
         <p:spPr>
           <a:xfrm>
-            <a:off x="975335" y="1371600"/>
-            <a:ext cx="7558851" cy="1463040"/>
+            <a:off x="853418" y="2057400"/>
+            <a:ext cx="6095847" cy="1554480"/>
           </a:xfrm>
         </p:spPr>
         <p:txBody>
@@ -3660,14 +3357,14 @@
       </p:sp>
       <p:sp>
         <p:nvSpPr>
-          <p:cNvPr id="14" name="한 줄 문구"/>
+          <p:cNvPr id="4" name="한 줄 문구"/>
           <p:cNvSpPr txBox="1"/>
           <p:nvPr/>
         </p:nvSpPr>
         <p:spPr>
           <a:xfrm>
-            <a:off x="975335" y="2926080"/>
-            <a:ext cx="7315017" cy="822960"/>
+            <a:off x="853418" y="3749039"/>
+            <a:ext cx="6095847" cy="822960"/>
           </a:xfrm>
           <a:prstGeom prst="rect">
             <a:avLst/>
@@ -3691,21 +3388,21 @@
                   <a:srgbClr val="431920"/>
                 </a:solidFill>
               </a:rPr>
-              <a:t>새해 복 많이 받으세요, 올해의 이야기를 시작합니다</a:t>
-            </a:r>
-          </a:p>
-        </p:txBody>
-      </p:sp>
-      <p:sp>
-        <p:nvSpPr>
-          <p:cNvPr id="15" name="안내 문구"/>
+              <a:t>연말 전에 마무리할 일 목록입니다</a:t>
+            </a:r>
+          </a:p>
+        </p:txBody>
+      </p:sp>
+      <p:sp>
+        <p:nvSpPr>
+          <p:cNvPr id="5" name="안내 문구"/>
           <p:cNvSpPr txBox="1"/>
           <p:nvPr/>
         </p:nvSpPr>
         <p:spPr>
           <a:xfrm>
-            <a:off x="975335" y="3794760"/>
-            <a:ext cx="7315017" cy="914400"/>
+            <a:off x="853418" y="4617720"/>
+            <a:ext cx="6095847" cy="914400"/>
           </a:xfrm>
           <a:prstGeom prst="rect">
             <a:avLst/>
@@ -3744,7 +3441,7 @@
                   <a:srgbClr val="666666"/>
                 </a:solidFill>
               </a:rPr>
-              <a:t>2026. 00. 00</a:t>
+              <a:t>2027. 00. 00</a:t>
             </a:r>
           </a:p>
         </p:txBody>
@@ -3835,267 +3532,6 @@
       </p:sp>
       <p:sp>
         <p:nvSpPr>
-          <p:cNvPr id="5" name="장식"/>
-          <p:cNvSpPr/>
-          <p:nvPr/>
-        </p:nvSpPr>
-        <p:spPr>
-          <a:xfrm>
-            <a:off x="10789920" y="525780"/>
-            <a:ext cx="301752" cy="502920"/>
-          </a:xfrm>
-          <a:prstGeom prst="roundRect">
-            <a:avLst/>
-          </a:prstGeom>
-          <a:solidFill>
-            <a:srgbClr val="8D3443"/>
-          </a:solidFill>
-          <a:ln>
-            <a:noFill/>
-          </a:ln>
-        </p:spPr>
-        <p:txBody>
-          <a:bodyPr rtlCol="0" anchor="ctr"/>
-          <a:lstStyle/>
-          <a:p>
-            <a:pPr algn="ctr"/>
-          </a:p>
-        </p:txBody>
-      </p:sp>
-      <p:sp>
-        <p:nvSpPr>
-          <p:cNvPr id="6" name="장식"/>
-          <p:cNvSpPr/>
-          <p:nvPr/>
-        </p:nvSpPr>
-        <p:spPr>
-          <a:xfrm>
-            <a:off x="10865358" y="475487"/>
-            <a:ext cx="150876" cy="50292"/>
-          </a:xfrm>
-          <a:prstGeom prst="rect">
-            <a:avLst/>
-          </a:prstGeom>
-          <a:solidFill>
-            <a:srgbClr val="3B9158"/>
-          </a:solidFill>
-          <a:ln>
-            <a:noFill/>
-          </a:ln>
-        </p:spPr>
-        <p:txBody>
-          <a:bodyPr rtlCol="0" anchor="ctr"/>
-          <a:lstStyle/>
-          <a:p>
-            <a:pPr algn="ctr"/>
-          </a:p>
-        </p:txBody>
-      </p:sp>
-      <p:sp>
-        <p:nvSpPr>
-          <p:cNvPr id="7" name="장식"/>
-          <p:cNvSpPr/>
-          <p:nvPr/>
-        </p:nvSpPr>
-        <p:spPr>
-          <a:xfrm>
-            <a:off x="10865358" y="1028700"/>
-            <a:ext cx="150876" cy="50292"/>
-          </a:xfrm>
-          <a:prstGeom prst="rect">
-            <a:avLst/>
-          </a:prstGeom>
-          <a:solidFill>
-            <a:srgbClr val="3B9158"/>
-          </a:solidFill>
-          <a:ln>
-            <a:noFill/>
-          </a:ln>
-        </p:spPr>
-        <p:txBody>
-          <a:bodyPr rtlCol="0" anchor="ctr"/>
-          <a:lstStyle/>
-          <a:p>
-            <a:pPr algn="ctr"/>
-          </a:p>
-        </p:txBody>
-      </p:sp>
-      <p:sp>
-        <p:nvSpPr>
-          <p:cNvPr id="8" name="장식"/>
-          <p:cNvSpPr/>
-          <p:nvPr/>
-        </p:nvSpPr>
-        <p:spPr>
-          <a:xfrm>
-            <a:off x="11172139" y="706831"/>
-            <a:ext cx="301752" cy="422452"/>
-          </a:xfrm>
-          <a:prstGeom prst="roundRect">
-            <a:avLst/>
-          </a:prstGeom>
-          <a:solidFill>
-            <a:srgbClr val="F0D1D6"/>
-          </a:solidFill>
-          <a:ln>
-            <a:noFill/>
-          </a:ln>
-        </p:spPr>
-        <p:txBody>
-          <a:bodyPr rtlCol="0" anchor="ctr"/>
-          <a:lstStyle/>
-          <a:p>
-            <a:pPr algn="ctr"/>
-          </a:p>
-        </p:txBody>
-      </p:sp>
-      <p:sp>
-        <p:nvSpPr>
-          <p:cNvPr id="9" name="장식"/>
-          <p:cNvSpPr/>
-          <p:nvPr/>
-        </p:nvSpPr>
-        <p:spPr>
-          <a:xfrm>
-            <a:off x="11247577" y="656539"/>
-            <a:ext cx="150876" cy="50292"/>
-          </a:xfrm>
-          <a:prstGeom prst="rect">
-            <a:avLst/>
-          </a:prstGeom>
-          <a:solidFill>
-            <a:srgbClr val="3B9158"/>
-          </a:solidFill>
-          <a:ln>
-            <a:noFill/>
-          </a:ln>
-        </p:spPr>
-        <p:txBody>
-          <a:bodyPr rtlCol="0" anchor="ctr"/>
-          <a:lstStyle/>
-          <a:p>
-            <a:pPr algn="ctr"/>
-          </a:p>
-        </p:txBody>
-      </p:sp>
-      <p:sp>
-        <p:nvSpPr>
-          <p:cNvPr id="10" name="장식"/>
-          <p:cNvSpPr/>
-          <p:nvPr/>
-        </p:nvSpPr>
-        <p:spPr>
-          <a:xfrm>
-            <a:off x="11247577" y="1129284"/>
-            <a:ext cx="150876" cy="50292"/>
-          </a:xfrm>
-          <a:prstGeom prst="rect">
-            <a:avLst/>
-          </a:prstGeom>
-          <a:solidFill>
-            <a:srgbClr val="3B9158"/>
-          </a:solidFill>
-          <a:ln>
-            <a:noFill/>
-          </a:ln>
-        </p:spPr>
-        <p:txBody>
-          <a:bodyPr rtlCol="0" anchor="ctr"/>
-          <a:lstStyle/>
-          <a:p>
-            <a:pPr algn="ctr"/>
-          </a:p>
-        </p:txBody>
-      </p:sp>
-      <p:sp>
-        <p:nvSpPr>
-          <p:cNvPr id="11" name="장식"/>
-          <p:cNvSpPr/>
-          <p:nvPr/>
-        </p:nvSpPr>
-        <p:spPr>
-          <a:xfrm>
-            <a:off x="11554358" y="525780"/>
-            <a:ext cx="301752" cy="502920"/>
-          </a:xfrm>
-          <a:prstGeom prst="roundRect">
-            <a:avLst/>
-          </a:prstGeom>
-          <a:solidFill>
-            <a:srgbClr val="3B9158"/>
-          </a:solidFill>
-          <a:ln>
-            <a:noFill/>
-          </a:ln>
-        </p:spPr>
-        <p:txBody>
-          <a:bodyPr rtlCol="0" anchor="ctr"/>
-          <a:lstStyle/>
-          <a:p>
-            <a:pPr algn="ctr"/>
-          </a:p>
-        </p:txBody>
-      </p:sp>
-      <p:sp>
-        <p:nvSpPr>
-          <p:cNvPr id="12" name="장식"/>
-          <p:cNvSpPr/>
-          <p:nvPr/>
-        </p:nvSpPr>
-        <p:spPr>
-          <a:xfrm>
-            <a:off x="11629796" y="475487"/>
-            <a:ext cx="150876" cy="50292"/>
-          </a:xfrm>
-          <a:prstGeom prst="rect">
-            <a:avLst/>
-          </a:prstGeom>
-          <a:solidFill>
-            <a:srgbClr val="8D3443"/>
-          </a:solidFill>
-          <a:ln>
-            <a:noFill/>
-          </a:ln>
-        </p:spPr>
-        <p:txBody>
-          <a:bodyPr rtlCol="0" anchor="ctr"/>
-          <a:lstStyle/>
-          <a:p>
-            <a:pPr algn="ctr"/>
-          </a:p>
-        </p:txBody>
-      </p:sp>
-      <p:sp>
-        <p:nvSpPr>
-          <p:cNvPr id="13" name="장식"/>
-          <p:cNvSpPr/>
-          <p:nvPr/>
-        </p:nvSpPr>
-        <p:spPr>
-          <a:xfrm>
-            <a:off x="11629796" y="1028700"/>
-            <a:ext cx="150876" cy="50292"/>
-          </a:xfrm>
-          <a:prstGeom prst="rect">
-            <a:avLst/>
-          </a:prstGeom>
-          <a:solidFill>
-            <a:srgbClr val="8D3443"/>
-          </a:solidFill>
-          <a:ln>
-            <a:noFill/>
-          </a:ln>
-        </p:spPr>
-        <p:txBody>
-          <a:bodyPr rtlCol="0" anchor="ctr"/>
-          <a:lstStyle/>
-          <a:p>
-            <a:pPr algn="ctr"/>
-          </a:p>
-        </p:txBody>
-      </p:sp>
-      <p:sp>
-        <p:nvSpPr>
           <p:cNvPr id="2" name="Title 1"/>
           <p:cNvSpPr>
             <a:spLocks noGrp="1"/>
@@ -4134,7 +3570,7 @@
       </p:sp>
       <p:sp>
         <p:nvSpPr>
-          <p:cNvPr id="14" name="줄 1"/>
+          <p:cNvPr id="5" name="줄 1"/>
           <p:cNvSpPr/>
           <p:nvPr/>
         </p:nvSpPr>
@@ -4167,7 +3603,7 @@
       </p:sp>
       <p:sp>
         <p:nvSpPr>
-          <p:cNvPr id="15" name="번호 1"/>
+          <p:cNvPr id="6" name="번호 1"/>
           <p:cNvSpPr/>
           <p:nvPr/>
         </p:nvSpPr>
@@ -4210,7 +3646,7 @@
       </p:sp>
       <p:sp>
         <p:nvSpPr>
-          <p:cNvPr id="16" name="TextBox 15"/>
+          <p:cNvPr id="7" name="TextBox 6"/>
           <p:cNvSpPr txBox="1"/>
           <p:nvPr/>
         </p:nvSpPr>
@@ -4248,7 +3684,7 @@
       </p:sp>
       <p:sp>
         <p:nvSpPr>
-          <p:cNvPr id="17" name="TextBox 16"/>
+          <p:cNvPr id="8" name="TextBox 7"/>
           <p:cNvSpPr txBox="1"/>
           <p:nvPr/>
         </p:nvSpPr>
@@ -4286,7 +3722,7 @@
       </p:sp>
       <p:sp>
         <p:nvSpPr>
-          <p:cNvPr id="18" name="줄 2"/>
+          <p:cNvPr id="9" name="줄 2"/>
           <p:cNvSpPr/>
           <p:nvPr/>
         </p:nvSpPr>
@@ -4319,7 +3755,7 @@
       </p:sp>
       <p:sp>
         <p:nvSpPr>
-          <p:cNvPr id="19" name="번호 2"/>
+          <p:cNvPr id="10" name="번호 2"/>
           <p:cNvSpPr/>
           <p:nvPr/>
         </p:nvSpPr>
@@ -4362,7 +3798,7 @@
       </p:sp>
       <p:sp>
         <p:nvSpPr>
-          <p:cNvPr id="20" name="TextBox 19"/>
+          <p:cNvPr id="11" name="TextBox 10"/>
           <p:cNvSpPr txBox="1"/>
           <p:nvPr/>
         </p:nvSpPr>
@@ -4400,7 +3836,7 @@
       </p:sp>
       <p:sp>
         <p:nvSpPr>
-          <p:cNvPr id="21" name="TextBox 20"/>
+          <p:cNvPr id="12" name="TextBox 11"/>
           <p:cNvSpPr txBox="1"/>
           <p:nvPr/>
         </p:nvSpPr>
@@ -4438,7 +3874,7 @@
       </p:sp>
       <p:sp>
         <p:nvSpPr>
-          <p:cNvPr id="22" name="줄 3"/>
+          <p:cNvPr id="13" name="줄 3"/>
           <p:cNvSpPr/>
           <p:nvPr/>
         </p:nvSpPr>
@@ -4471,7 +3907,7 @@
       </p:sp>
       <p:sp>
         <p:nvSpPr>
-          <p:cNvPr id="23" name="번호 3"/>
+          <p:cNvPr id="14" name="번호 3"/>
           <p:cNvSpPr/>
           <p:nvPr/>
         </p:nvSpPr>
@@ -4514,7 +3950,7 @@
       </p:sp>
       <p:sp>
         <p:nvSpPr>
-          <p:cNvPr id="24" name="TextBox 23"/>
+          <p:cNvPr id="15" name="TextBox 14"/>
           <p:cNvSpPr txBox="1"/>
           <p:nvPr/>
         </p:nvSpPr>
@@ -4552,7 +3988,7 @@
       </p:sp>
       <p:sp>
         <p:nvSpPr>
-          <p:cNvPr id="25" name="TextBox 24"/>
+          <p:cNvPr id="16" name="TextBox 15"/>
           <p:cNvSpPr txBox="1"/>
           <p:nvPr/>
         </p:nvSpPr>
@@ -4590,7 +4026,7 @@
       </p:sp>
       <p:sp>
         <p:nvSpPr>
-          <p:cNvPr id="26" name="줄 4"/>
+          <p:cNvPr id="17" name="줄 4"/>
           <p:cNvSpPr/>
           <p:nvPr/>
         </p:nvSpPr>
@@ -4623,7 +4059,7 @@
       </p:sp>
       <p:sp>
         <p:nvSpPr>
-          <p:cNvPr id="27" name="번호 4"/>
+          <p:cNvPr id="18" name="번호 4"/>
           <p:cNvSpPr/>
           <p:nvPr/>
         </p:nvSpPr>
@@ -4666,7 +4102,7 @@
       </p:sp>
       <p:sp>
         <p:nvSpPr>
-          <p:cNvPr id="28" name="TextBox 27"/>
+          <p:cNvPr id="19" name="TextBox 18"/>
           <p:cNvSpPr txBox="1"/>
           <p:nvPr/>
         </p:nvSpPr>
@@ -4704,7 +4140,7 @@
       </p:sp>
       <p:sp>
         <p:nvSpPr>
-          <p:cNvPr id="29" name="TextBox 28"/>
+          <p:cNvPr id="20" name="TextBox 19"/>
           <p:cNvSpPr txBox="1"/>
           <p:nvPr/>
         </p:nvSpPr>
@@ -4826,267 +4262,6 @@
       </p:sp>
       <p:sp>
         <p:nvSpPr>
-          <p:cNvPr id="5" name="장식"/>
-          <p:cNvSpPr/>
-          <p:nvPr/>
-        </p:nvSpPr>
-        <p:spPr>
-          <a:xfrm>
-            <a:off x="10789920" y="525780"/>
-            <a:ext cx="301752" cy="502920"/>
-          </a:xfrm>
-          <a:prstGeom prst="roundRect">
-            <a:avLst/>
-          </a:prstGeom>
-          <a:solidFill>
-            <a:srgbClr val="8D3443"/>
-          </a:solidFill>
-          <a:ln>
-            <a:noFill/>
-          </a:ln>
-        </p:spPr>
-        <p:txBody>
-          <a:bodyPr rtlCol="0" anchor="ctr"/>
-          <a:lstStyle/>
-          <a:p>
-            <a:pPr algn="ctr"/>
-          </a:p>
-        </p:txBody>
-      </p:sp>
-      <p:sp>
-        <p:nvSpPr>
-          <p:cNvPr id="6" name="장식"/>
-          <p:cNvSpPr/>
-          <p:nvPr/>
-        </p:nvSpPr>
-        <p:spPr>
-          <a:xfrm>
-            <a:off x="10865358" y="475487"/>
-            <a:ext cx="150876" cy="50292"/>
-          </a:xfrm>
-          <a:prstGeom prst="rect">
-            <a:avLst/>
-          </a:prstGeom>
-          <a:solidFill>
-            <a:srgbClr val="3B9158"/>
-          </a:solidFill>
-          <a:ln>
-            <a:noFill/>
-          </a:ln>
-        </p:spPr>
-        <p:txBody>
-          <a:bodyPr rtlCol="0" anchor="ctr"/>
-          <a:lstStyle/>
-          <a:p>
-            <a:pPr algn="ctr"/>
-          </a:p>
-        </p:txBody>
-      </p:sp>
-      <p:sp>
-        <p:nvSpPr>
-          <p:cNvPr id="7" name="장식"/>
-          <p:cNvSpPr/>
-          <p:nvPr/>
-        </p:nvSpPr>
-        <p:spPr>
-          <a:xfrm>
-            <a:off x="10865358" y="1028700"/>
-            <a:ext cx="150876" cy="50292"/>
-          </a:xfrm>
-          <a:prstGeom prst="rect">
-            <a:avLst/>
-          </a:prstGeom>
-          <a:solidFill>
-            <a:srgbClr val="3B9158"/>
-          </a:solidFill>
-          <a:ln>
-            <a:noFill/>
-          </a:ln>
-        </p:spPr>
-        <p:txBody>
-          <a:bodyPr rtlCol="0" anchor="ctr"/>
-          <a:lstStyle/>
-          <a:p>
-            <a:pPr algn="ctr"/>
-          </a:p>
-        </p:txBody>
-      </p:sp>
-      <p:sp>
-        <p:nvSpPr>
-          <p:cNvPr id="8" name="장식"/>
-          <p:cNvSpPr/>
-          <p:nvPr/>
-        </p:nvSpPr>
-        <p:spPr>
-          <a:xfrm>
-            <a:off x="11172139" y="706831"/>
-            <a:ext cx="301752" cy="422452"/>
-          </a:xfrm>
-          <a:prstGeom prst="roundRect">
-            <a:avLst/>
-          </a:prstGeom>
-          <a:solidFill>
-            <a:srgbClr val="F0D1D6"/>
-          </a:solidFill>
-          <a:ln>
-            <a:noFill/>
-          </a:ln>
-        </p:spPr>
-        <p:txBody>
-          <a:bodyPr rtlCol="0" anchor="ctr"/>
-          <a:lstStyle/>
-          <a:p>
-            <a:pPr algn="ctr"/>
-          </a:p>
-        </p:txBody>
-      </p:sp>
-      <p:sp>
-        <p:nvSpPr>
-          <p:cNvPr id="9" name="장식"/>
-          <p:cNvSpPr/>
-          <p:nvPr/>
-        </p:nvSpPr>
-        <p:spPr>
-          <a:xfrm>
-            <a:off x="11247577" y="656539"/>
-            <a:ext cx="150876" cy="50292"/>
-          </a:xfrm>
-          <a:prstGeom prst="rect">
-            <a:avLst/>
-          </a:prstGeom>
-          <a:solidFill>
-            <a:srgbClr val="3B9158"/>
-          </a:solidFill>
-          <a:ln>
-            <a:noFill/>
-          </a:ln>
-        </p:spPr>
-        <p:txBody>
-          <a:bodyPr rtlCol="0" anchor="ctr"/>
-          <a:lstStyle/>
-          <a:p>
-            <a:pPr algn="ctr"/>
-          </a:p>
-        </p:txBody>
-      </p:sp>
-      <p:sp>
-        <p:nvSpPr>
-          <p:cNvPr id="10" name="장식"/>
-          <p:cNvSpPr/>
-          <p:nvPr/>
-        </p:nvSpPr>
-        <p:spPr>
-          <a:xfrm>
-            <a:off x="11247577" y="1129284"/>
-            <a:ext cx="150876" cy="50292"/>
-          </a:xfrm>
-          <a:prstGeom prst="rect">
-            <a:avLst/>
-          </a:prstGeom>
-          <a:solidFill>
-            <a:srgbClr val="3B9158"/>
-          </a:solidFill>
-          <a:ln>
-            <a:noFill/>
-          </a:ln>
-        </p:spPr>
-        <p:txBody>
-          <a:bodyPr rtlCol="0" anchor="ctr"/>
-          <a:lstStyle/>
-          <a:p>
-            <a:pPr algn="ctr"/>
-          </a:p>
-        </p:txBody>
-      </p:sp>
-      <p:sp>
-        <p:nvSpPr>
-          <p:cNvPr id="11" name="장식"/>
-          <p:cNvSpPr/>
-          <p:nvPr/>
-        </p:nvSpPr>
-        <p:spPr>
-          <a:xfrm>
-            <a:off x="11554358" y="525780"/>
-            <a:ext cx="301752" cy="502920"/>
-          </a:xfrm>
-          <a:prstGeom prst="roundRect">
-            <a:avLst/>
-          </a:prstGeom>
-          <a:solidFill>
-            <a:srgbClr val="3B9158"/>
-          </a:solidFill>
-          <a:ln>
-            <a:noFill/>
-          </a:ln>
-        </p:spPr>
-        <p:txBody>
-          <a:bodyPr rtlCol="0" anchor="ctr"/>
-          <a:lstStyle/>
-          <a:p>
-            <a:pPr algn="ctr"/>
-          </a:p>
-        </p:txBody>
-      </p:sp>
-      <p:sp>
-        <p:nvSpPr>
-          <p:cNvPr id="12" name="장식"/>
-          <p:cNvSpPr/>
-          <p:nvPr/>
-        </p:nvSpPr>
-        <p:spPr>
-          <a:xfrm>
-            <a:off x="11629796" y="475487"/>
-            <a:ext cx="150876" cy="50292"/>
-          </a:xfrm>
-          <a:prstGeom prst="rect">
-            <a:avLst/>
-          </a:prstGeom>
-          <a:solidFill>
-            <a:srgbClr val="8D3443"/>
-          </a:solidFill>
-          <a:ln>
-            <a:noFill/>
-          </a:ln>
-        </p:spPr>
-        <p:txBody>
-          <a:bodyPr rtlCol="0" anchor="ctr"/>
-          <a:lstStyle/>
-          <a:p>
-            <a:pPr algn="ctr"/>
-          </a:p>
-        </p:txBody>
-      </p:sp>
-      <p:sp>
-        <p:nvSpPr>
-          <p:cNvPr id="13" name="장식"/>
-          <p:cNvSpPr/>
-          <p:nvPr/>
-        </p:nvSpPr>
-        <p:spPr>
-          <a:xfrm>
-            <a:off x="11629796" y="1028700"/>
-            <a:ext cx="150876" cy="50292"/>
-          </a:xfrm>
-          <a:prstGeom prst="rect">
-            <a:avLst/>
-          </a:prstGeom>
-          <a:solidFill>
-            <a:srgbClr val="8D3443"/>
-          </a:solidFill>
-          <a:ln>
-            <a:noFill/>
-          </a:ln>
-        </p:spPr>
-        <p:txBody>
-          <a:bodyPr rtlCol="0" anchor="ctr"/>
-          <a:lstStyle/>
-          <a:p>
-            <a:pPr algn="ctr"/>
-          </a:p>
-        </p:txBody>
-      </p:sp>
-      <p:sp>
-        <p:nvSpPr>
           <p:cNvPr id="2" name="Title 1"/>
           <p:cNvSpPr>
             <a:spLocks noGrp="1"/>
@@ -5125,7 +4300,7 @@
       </p:sp>
       <p:sp>
         <p:nvSpPr>
-          <p:cNvPr id="14" name="핵심 문장"/>
+          <p:cNvPr id="5" name="핵심 문장"/>
           <p:cNvSpPr txBox="1"/>
           <p:nvPr/>
         </p:nvSpPr>
@@ -5163,7 +4338,7 @@
       </p:sp>
       <p:sp>
         <p:nvSpPr>
-          <p:cNvPr id="15" name="카드 1"/>
+          <p:cNvPr id="6" name="카드 1"/>
           <p:cNvSpPr/>
           <p:nvPr/>
         </p:nvSpPr>
@@ -5196,7 +4371,7 @@
       </p:sp>
       <p:sp>
         <p:nvSpPr>
-          <p:cNvPr id="16" name="번호 1"/>
+          <p:cNvPr id="7" name="번호 1"/>
           <p:cNvSpPr/>
           <p:nvPr/>
         </p:nvSpPr>
@@ -5239,7 +4414,7 @@
       </p:sp>
       <p:sp>
         <p:nvSpPr>
-          <p:cNvPr id="17" name="TextBox 16"/>
+          <p:cNvPr id="8" name="TextBox 7"/>
           <p:cNvSpPr txBox="1"/>
           <p:nvPr/>
         </p:nvSpPr>
@@ -5277,7 +4452,7 @@
       </p:sp>
       <p:sp>
         <p:nvSpPr>
-          <p:cNvPr id="18" name="TextBox 17"/>
+          <p:cNvPr id="9" name="TextBox 8"/>
           <p:cNvSpPr txBox="1"/>
           <p:nvPr/>
         </p:nvSpPr>
@@ -5330,7 +4505,7 @@
       </p:sp>
       <p:sp>
         <p:nvSpPr>
-          <p:cNvPr id="19" name="카드 2"/>
+          <p:cNvPr id="10" name="카드 2"/>
           <p:cNvSpPr/>
           <p:nvPr/>
         </p:nvSpPr>
@@ -5363,7 +4538,7 @@
       </p:sp>
       <p:sp>
         <p:nvSpPr>
-          <p:cNvPr id="20" name="번호 2"/>
+          <p:cNvPr id="11" name="번호 2"/>
           <p:cNvSpPr/>
           <p:nvPr/>
         </p:nvSpPr>
@@ -5406,7 +4581,7 @@
       </p:sp>
       <p:sp>
         <p:nvSpPr>
-          <p:cNvPr id="21" name="TextBox 20"/>
+          <p:cNvPr id="12" name="TextBox 11"/>
           <p:cNvSpPr txBox="1"/>
           <p:nvPr/>
         </p:nvSpPr>
@@ -5444,7 +4619,7 @@
       </p:sp>
       <p:sp>
         <p:nvSpPr>
-          <p:cNvPr id="22" name="TextBox 21"/>
+          <p:cNvPr id="13" name="TextBox 12"/>
           <p:cNvSpPr txBox="1"/>
           <p:nvPr/>
         </p:nvSpPr>
@@ -5497,7 +4672,7 @@
       </p:sp>
       <p:sp>
         <p:nvSpPr>
-          <p:cNvPr id="23" name="카드 3"/>
+          <p:cNvPr id="14" name="카드 3"/>
           <p:cNvSpPr/>
           <p:nvPr/>
         </p:nvSpPr>
@@ -5530,7 +4705,7 @@
       </p:sp>
       <p:sp>
         <p:nvSpPr>
-          <p:cNvPr id="24" name="번호 3"/>
+          <p:cNvPr id="15" name="번호 3"/>
           <p:cNvSpPr/>
           <p:nvPr/>
         </p:nvSpPr>
@@ -5573,7 +4748,7 @@
       </p:sp>
       <p:sp>
         <p:nvSpPr>
-          <p:cNvPr id="25" name="TextBox 24"/>
+          <p:cNvPr id="16" name="TextBox 15"/>
           <p:cNvSpPr txBox="1"/>
           <p:nvPr/>
         </p:nvSpPr>
@@ -5611,7 +4786,7 @@
       </p:sp>
       <p:sp>
         <p:nvSpPr>
-          <p:cNvPr id="26" name="TextBox 25"/>
+          <p:cNvPr id="17" name="TextBox 16"/>
           <p:cNvSpPr txBox="1"/>
           <p:nvPr/>
         </p:nvSpPr>
@@ -5748,267 +4923,6 @@
       </p:sp>
       <p:sp>
         <p:nvSpPr>
-          <p:cNvPr id="5" name="장식"/>
-          <p:cNvSpPr/>
-          <p:nvPr/>
-        </p:nvSpPr>
-        <p:spPr>
-          <a:xfrm>
-            <a:off x="10789920" y="525780"/>
-            <a:ext cx="301752" cy="502920"/>
-          </a:xfrm>
-          <a:prstGeom prst="roundRect">
-            <a:avLst/>
-          </a:prstGeom>
-          <a:solidFill>
-            <a:srgbClr val="8D3443"/>
-          </a:solidFill>
-          <a:ln>
-            <a:noFill/>
-          </a:ln>
-        </p:spPr>
-        <p:txBody>
-          <a:bodyPr rtlCol="0" anchor="ctr"/>
-          <a:lstStyle/>
-          <a:p>
-            <a:pPr algn="ctr"/>
-          </a:p>
-        </p:txBody>
-      </p:sp>
-      <p:sp>
-        <p:nvSpPr>
-          <p:cNvPr id="6" name="장식"/>
-          <p:cNvSpPr/>
-          <p:nvPr/>
-        </p:nvSpPr>
-        <p:spPr>
-          <a:xfrm>
-            <a:off x="10865358" y="475487"/>
-            <a:ext cx="150876" cy="50292"/>
-          </a:xfrm>
-          <a:prstGeom prst="rect">
-            <a:avLst/>
-          </a:prstGeom>
-          <a:solidFill>
-            <a:srgbClr val="3B9158"/>
-          </a:solidFill>
-          <a:ln>
-            <a:noFill/>
-          </a:ln>
-        </p:spPr>
-        <p:txBody>
-          <a:bodyPr rtlCol="0" anchor="ctr"/>
-          <a:lstStyle/>
-          <a:p>
-            <a:pPr algn="ctr"/>
-          </a:p>
-        </p:txBody>
-      </p:sp>
-      <p:sp>
-        <p:nvSpPr>
-          <p:cNvPr id="7" name="장식"/>
-          <p:cNvSpPr/>
-          <p:nvPr/>
-        </p:nvSpPr>
-        <p:spPr>
-          <a:xfrm>
-            <a:off x="10865358" y="1028700"/>
-            <a:ext cx="150876" cy="50292"/>
-          </a:xfrm>
-          <a:prstGeom prst="rect">
-            <a:avLst/>
-          </a:prstGeom>
-          <a:solidFill>
-            <a:srgbClr val="3B9158"/>
-          </a:solidFill>
-          <a:ln>
-            <a:noFill/>
-          </a:ln>
-        </p:spPr>
-        <p:txBody>
-          <a:bodyPr rtlCol="0" anchor="ctr"/>
-          <a:lstStyle/>
-          <a:p>
-            <a:pPr algn="ctr"/>
-          </a:p>
-        </p:txBody>
-      </p:sp>
-      <p:sp>
-        <p:nvSpPr>
-          <p:cNvPr id="8" name="장식"/>
-          <p:cNvSpPr/>
-          <p:nvPr/>
-        </p:nvSpPr>
-        <p:spPr>
-          <a:xfrm>
-            <a:off x="11172139" y="706831"/>
-            <a:ext cx="301752" cy="422452"/>
-          </a:xfrm>
-          <a:prstGeom prst="roundRect">
-            <a:avLst/>
-          </a:prstGeom>
-          <a:solidFill>
-            <a:srgbClr val="F0D1D6"/>
-          </a:solidFill>
-          <a:ln>
-            <a:noFill/>
-          </a:ln>
-        </p:spPr>
-        <p:txBody>
-          <a:bodyPr rtlCol="0" anchor="ctr"/>
-          <a:lstStyle/>
-          <a:p>
-            <a:pPr algn="ctr"/>
-          </a:p>
-        </p:txBody>
-      </p:sp>
-      <p:sp>
-        <p:nvSpPr>
-          <p:cNvPr id="9" name="장식"/>
-          <p:cNvSpPr/>
-          <p:nvPr/>
-        </p:nvSpPr>
-        <p:spPr>
-          <a:xfrm>
-            <a:off x="11247577" y="656539"/>
-            <a:ext cx="150876" cy="50292"/>
-          </a:xfrm>
-          <a:prstGeom prst="rect">
-            <a:avLst/>
-          </a:prstGeom>
-          <a:solidFill>
-            <a:srgbClr val="3B9158"/>
-          </a:solidFill>
-          <a:ln>
-            <a:noFill/>
-          </a:ln>
-        </p:spPr>
-        <p:txBody>
-          <a:bodyPr rtlCol="0" anchor="ctr"/>
-          <a:lstStyle/>
-          <a:p>
-            <a:pPr algn="ctr"/>
-          </a:p>
-        </p:txBody>
-      </p:sp>
-      <p:sp>
-        <p:nvSpPr>
-          <p:cNvPr id="10" name="장식"/>
-          <p:cNvSpPr/>
-          <p:nvPr/>
-        </p:nvSpPr>
-        <p:spPr>
-          <a:xfrm>
-            <a:off x="11247577" y="1129284"/>
-            <a:ext cx="150876" cy="50292"/>
-          </a:xfrm>
-          <a:prstGeom prst="rect">
-            <a:avLst/>
-          </a:prstGeom>
-          <a:solidFill>
-            <a:srgbClr val="3B9158"/>
-          </a:solidFill>
-          <a:ln>
-            <a:noFill/>
-          </a:ln>
-        </p:spPr>
-        <p:txBody>
-          <a:bodyPr rtlCol="0" anchor="ctr"/>
-          <a:lstStyle/>
-          <a:p>
-            <a:pPr algn="ctr"/>
-          </a:p>
-        </p:txBody>
-      </p:sp>
-      <p:sp>
-        <p:nvSpPr>
-          <p:cNvPr id="11" name="장식"/>
-          <p:cNvSpPr/>
-          <p:nvPr/>
-        </p:nvSpPr>
-        <p:spPr>
-          <a:xfrm>
-            <a:off x="11554358" y="525780"/>
-            <a:ext cx="301752" cy="502920"/>
-          </a:xfrm>
-          <a:prstGeom prst="roundRect">
-            <a:avLst/>
-          </a:prstGeom>
-          <a:solidFill>
-            <a:srgbClr val="3B9158"/>
-          </a:solidFill>
-          <a:ln>
-            <a:noFill/>
-          </a:ln>
-        </p:spPr>
-        <p:txBody>
-          <a:bodyPr rtlCol="0" anchor="ctr"/>
-          <a:lstStyle/>
-          <a:p>
-            <a:pPr algn="ctr"/>
-          </a:p>
-        </p:txBody>
-      </p:sp>
-      <p:sp>
-        <p:nvSpPr>
-          <p:cNvPr id="12" name="장식"/>
-          <p:cNvSpPr/>
-          <p:nvPr/>
-        </p:nvSpPr>
-        <p:spPr>
-          <a:xfrm>
-            <a:off x="11629796" y="475487"/>
-            <a:ext cx="150876" cy="50292"/>
-          </a:xfrm>
-          <a:prstGeom prst="rect">
-            <a:avLst/>
-          </a:prstGeom>
-          <a:solidFill>
-            <a:srgbClr val="8D3443"/>
-          </a:solidFill>
-          <a:ln>
-            <a:noFill/>
-          </a:ln>
-        </p:spPr>
-        <p:txBody>
-          <a:bodyPr rtlCol="0" anchor="ctr"/>
-          <a:lstStyle/>
-          <a:p>
-            <a:pPr algn="ctr"/>
-          </a:p>
-        </p:txBody>
-      </p:sp>
-      <p:sp>
-        <p:nvSpPr>
-          <p:cNvPr id="13" name="장식"/>
-          <p:cNvSpPr/>
-          <p:nvPr/>
-        </p:nvSpPr>
-        <p:spPr>
-          <a:xfrm>
-            <a:off x="11629796" y="1028700"/>
-            <a:ext cx="150876" cy="50292"/>
-          </a:xfrm>
-          <a:prstGeom prst="rect">
-            <a:avLst/>
-          </a:prstGeom>
-          <a:solidFill>
-            <a:srgbClr val="8D3443"/>
-          </a:solidFill>
-          <a:ln>
-            <a:noFill/>
-          </a:ln>
-        </p:spPr>
-        <p:txBody>
-          <a:bodyPr rtlCol="0" anchor="ctr"/>
-          <a:lstStyle/>
-          <a:p>
-            <a:pPr algn="ctr"/>
-          </a:p>
-        </p:txBody>
-      </p:sp>
-      <p:sp>
-        <p:nvSpPr>
           <p:cNvPr id="2" name="Title 1"/>
           <p:cNvSpPr>
             <a:spLocks noGrp="1"/>
@@ -6047,7 +4961,7 @@
       </p:sp>
       <p:sp>
         <p:nvSpPr>
-          <p:cNvPr id="14" name="왼쪽 칸"/>
+          <p:cNvPr id="5" name="왼쪽 칸"/>
           <p:cNvSpPr/>
           <p:nvPr/>
         </p:nvSpPr>
@@ -6080,7 +4994,7 @@
       </p:sp>
       <p:sp>
         <p:nvSpPr>
-          <p:cNvPr id="15" name="칸 제목 바"/>
+          <p:cNvPr id="6" name="칸 제목 바"/>
           <p:cNvSpPr/>
           <p:nvPr/>
         </p:nvSpPr>
@@ -6111,7 +5025,7 @@
       </p:sp>
       <p:sp>
         <p:nvSpPr>
-          <p:cNvPr id="16" name="TextBox 15"/>
+          <p:cNvPr id="7" name="TextBox 6"/>
           <p:cNvSpPr txBox="1"/>
           <p:nvPr/>
         </p:nvSpPr>
@@ -6149,7 +5063,7 @@
       </p:sp>
       <p:sp>
         <p:nvSpPr>
-          <p:cNvPr id="17" name="TextBox 16"/>
+          <p:cNvPr id="8" name="TextBox 7"/>
           <p:cNvSpPr txBox="1"/>
           <p:nvPr/>
         </p:nvSpPr>
@@ -6232,7 +5146,7 @@
       </p:sp>
       <p:sp>
         <p:nvSpPr>
-          <p:cNvPr id="18" name="오른쪽 칸"/>
+          <p:cNvPr id="9" name="오른쪽 칸"/>
           <p:cNvSpPr/>
           <p:nvPr/>
         </p:nvSpPr>
@@ -6265,7 +5179,7 @@
       </p:sp>
       <p:sp>
         <p:nvSpPr>
-          <p:cNvPr id="19" name="칸 제목 바"/>
+          <p:cNvPr id="10" name="칸 제목 바"/>
           <p:cNvSpPr/>
           <p:nvPr/>
         </p:nvSpPr>
@@ -6296,7 +5210,7 @@
       </p:sp>
       <p:sp>
         <p:nvSpPr>
-          <p:cNvPr id="20" name="TextBox 19"/>
+          <p:cNvPr id="11" name="TextBox 10"/>
           <p:cNvSpPr txBox="1"/>
           <p:nvPr/>
         </p:nvSpPr>
@@ -6334,7 +5248,7 @@
       </p:sp>
       <p:sp>
         <p:nvSpPr>
-          <p:cNvPr id="21" name="TextBox 20"/>
+          <p:cNvPr id="12" name="TextBox 11"/>
           <p:cNvSpPr txBox="1"/>
           <p:nvPr/>
         </p:nvSpPr>
@@ -6501,267 +5415,6 @@
       </p:sp>
       <p:sp>
         <p:nvSpPr>
-          <p:cNvPr id="5" name="장식"/>
-          <p:cNvSpPr/>
-          <p:nvPr/>
-        </p:nvSpPr>
-        <p:spPr>
-          <a:xfrm>
-            <a:off x="10789920" y="525780"/>
-            <a:ext cx="301752" cy="502920"/>
-          </a:xfrm>
-          <a:prstGeom prst="roundRect">
-            <a:avLst/>
-          </a:prstGeom>
-          <a:solidFill>
-            <a:srgbClr val="8D3443"/>
-          </a:solidFill>
-          <a:ln>
-            <a:noFill/>
-          </a:ln>
-        </p:spPr>
-        <p:txBody>
-          <a:bodyPr rtlCol="0" anchor="ctr"/>
-          <a:lstStyle/>
-          <a:p>
-            <a:pPr algn="ctr"/>
-          </a:p>
-        </p:txBody>
-      </p:sp>
-      <p:sp>
-        <p:nvSpPr>
-          <p:cNvPr id="6" name="장식"/>
-          <p:cNvSpPr/>
-          <p:nvPr/>
-        </p:nvSpPr>
-        <p:spPr>
-          <a:xfrm>
-            <a:off x="10865358" y="475487"/>
-            <a:ext cx="150876" cy="50292"/>
-          </a:xfrm>
-          <a:prstGeom prst="rect">
-            <a:avLst/>
-          </a:prstGeom>
-          <a:solidFill>
-            <a:srgbClr val="3B9158"/>
-          </a:solidFill>
-          <a:ln>
-            <a:noFill/>
-          </a:ln>
-        </p:spPr>
-        <p:txBody>
-          <a:bodyPr rtlCol="0" anchor="ctr"/>
-          <a:lstStyle/>
-          <a:p>
-            <a:pPr algn="ctr"/>
-          </a:p>
-        </p:txBody>
-      </p:sp>
-      <p:sp>
-        <p:nvSpPr>
-          <p:cNvPr id="7" name="장식"/>
-          <p:cNvSpPr/>
-          <p:nvPr/>
-        </p:nvSpPr>
-        <p:spPr>
-          <a:xfrm>
-            <a:off x="10865358" y="1028700"/>
-            <a:ext cx="150876" cy="50292"/>
-          </a:xfrm>
-          <a:prstGeom prst="rect">
-            <a:avLst/>
-          </a:prstGeom>
-          <a:solidFill>
-            <a:srgbClr val="3B9158"/>
-          </a:solidFill>
-          <a:ln>
-            <a:noFill/>
-          </a:ln>
-        </p:spPr>
-        <p:txBody>
-          <a:bodyPr rtlCol="0" anchor="ctr"/>
-          <a:lstStyle/>
-          <a:p>
-            <a:pPr algn="ctr"/>
-          </a:p>
-        </p:txBody>
-      </p:sp>
-      <p:sp>
-        <p:nvSpPr>
-          <p:cNvPr id="8" name="장식"/>
-          <p:cNvSpPr/>
-          <p:nvPr/>
-        </p:nvSpPr>
-        <p:spPr>
-          <a:xfrm>
-            <a:off x="11172139" y="706831"/>
-            <a:ext cx="301752" cy="422452"/>
-          </a:xfrm>
-          <a:prstGeom prst="roundRect">
-            <a:avLst/>
-          </a:prstGeom>
-          <a:solidFill>
-            <a:srgbClr val="F0D1D6"/>
-          </a:solidFill>
-          <a:ln>
-            <a:noFill/>
-          </a:ln>
-        </p:spPr>
-        <p:txBody>
-          <a:bodyPr rtlCol="0" anchor="ctr"/>
-          <a:lstStyle/>
-          <a:p>
-            <a:pPr algn="ctr"/>
-          </a:p>
-        </p:txBody>
-      </p:sp>
-      <p:sp>
-        <p:nvSpPr>
-          <p:cNvPr id="9" name="장식"/>
-          <p:cNvSpPr/>
-          <p:nvPr/>
-        </p:nvSpPr>
-        <p:spPr>
-          <a:xfrm>
-            <a:off x="11247577" y="656539"/>
-            <a:ext cx="150876" cy="50292"/>
-          </a:xfrm>
-          <a:prstGeom prst="rect">
-            <a:avLst/>
-          </a:prstGeom>
-          <a:solidFill>
-            <a:srgbClr val="3B9158"/>
-          </a:solidFill>
-          <a:ln>
-            <a:noFill/>
-          </a:ln>
-        </p:spPr>
-        <p:txBody>
-          <a:bodyPr rtlCol="0" anchor="ctr"/>
-          <a:lstStyle/>
-          <a:p>
-            <a:pPr algn="ctr"/>
-          </a:p>
-        </p:txBody>
-      </p:sp>
-      <p:sp>
-        <p:nvSpPr>
-          <p:cNvPr id="10" name="장식"/>
-          <p:cNvSpPr/>
-          <p:nvPr/>
-        </p:nvSpPr>
-        <p:spPr>
-          <a:xfrm>
-            <a:off x="11247577" y="1129284"/>
-            <a:ext cx="150876" cy="50292"/>
-          </a:xfrm>
-          <a:prstGeom prst="rect">
-            <a:avLst/>
-          </a:prstGeom>
-          <a:solidFill>
-            <a:srgbClr val="3B9158"/>
-          </a:solidFill>
-          <a:ln>
-            <a:noFill/>
-          </a:ln>
-        </p:spPr>
-        <p:txBody>
-          <a:bodyPr rtlCol="0" anchor="ctr"/>
-          <a:lstStyle/>
-          <a:p>
-            <a:pPr algn="ctr"/>
-          </a:p>
-        </p:txBody>
-      </p:sp>
-      <p:sp>
-        <p:nvSpPr>
-          <p:cNvPr id="11" name="장식"/>
-          <p:cNvSpPr/>
-          <p:nvPr/>
-        </p:nvSpPr>
-        <p:spPr>
-          <a:xfrm>
-            <a:off x="11554358" y="525780"/>
-            <a:ext cx="301752" cy="502920"/>
-          </a:xfrm>
-          <a:prstGeom prst="roundRect">
-            <a:avLst/>
-          </a:prstGeom>
-          <a:solidFill>
-            <a:srgbClr val="3B9158"/>
-          </a:solidFill>
-          <a:ln>
-            <a:noFill/>
-          </a:ln>
-        </p:spPr>
-        <p:txBody>
-          <a:bodyPr rtlCol="0" anchor="ctr"/>
-          <a:lstStyle/>
-          <a:p>
-            <a:pPr algn="ctr"/>
-          </a:p>
-        </p:txBody>
-      </p:sp>
-      <p:sp>
-        <p:nvSpPr>
-          <p:cNvPr id="12" name="장식"/>
-          <p:cNvSpPr/>
-          <p:nvPr/>
-        </p:nvSpPr>
-        <p:spPr>
-          <a:xfrm>
-            <a:off x="11629796" y="475487"/>
-            <a:ext cx="150876" cy="50292"/>
-          </a:xfrm>
-          <a:prstGeom prst="rect">
-            <a:avLst/>
-          </a:prstGeom>
-          <a:solidFill>
-            <a:srgbClr val="8D3443"/>
-          </a:solidFill>
-          <a:ln>
-            <a:noFill/>
-          </a:ln>
-        </p:spPr>
-        <p:txBody>
-          <a:bodyPr rtlCol="0" anchor="ctr"/>
-          <a:lstStyle/>
-          <a:p>
-            <a:pPr algn="ctr"/>
-          </a:p>
-        </p:txBody>
-      </p:sp>
-      <p:sp>
-        <p:nvSpPr>
-          <p:cNvPr id="13" name="장식"/>
-          <p:cNvSpPr/>
-          <p:nvPr/>
-        </p:nvSpPr>
-        <p:spPr>
-          <a:xfrm>
-            <a:off x="11629796" y="1028700"/>
-            <a:ext cx="150876" cy="50292"/>
-          </a:xfrm>
-          <a:prstGeom prst="rect">
-            <a:avLst/>
-          </a:prstGeom>
-          <a:solidFill>
-            <a:srgbClr val="8D3443"/>
-          </a:solidFill>
-          <a:ln>
-            <a:noFill/>
-          </a:ln>
-        </p:spPr>
-        <p:txBody>
-          <a:bodyPr rtlCol="0" anchor="ctr"/>
-          <a:lstStyle/>
-          <a:p>
-            <a:pPr algn="ctr"/>
-          </a:p>
-        </p:txBody>
-      </p:sp>
-      <p:sp>
-        <p:nvSpPr>
           <p:cNvPr id="2" name="Title 1"/>
           <p:cNvSpPr>
             <a:spLocks noGrp="1"/>
@@ -6800,7 +5453,7 @@
       </p:sp>
       <p:graphicFrame>
         <p:nvGraphicFramePr>
-          <p:cNvPr id="14" name="표"/>
+          <p:cNvPr id="5" name="표"/>
           <p:cNvGraphicFramePr>
             <a:graphicFrameLocks noGrp="1"/>
           </p:cNvGraphicFramePr>
@@ -7953,14 +6606,6 @@
 <file path=ppt/slides/slide6.xml><?xml version="1.0" encoding="utf-8"?>
 <p:sld xmlns:a="http://schemas.openxmlformats.org/drawingml/2006/main" xmlns:p="http://schemas.openxmlformats.org/presentationml/2006/main" xmlns:r="http://schemas.openxmlformats.org/officeDocument/2006/relationships">
   <p:cSld>
-    <p:bg>
-      <p:bgPr>
-        <a:solidFill>
-          <a:srgbClr val="FFFFFF"/>
-        </a:solidFill>
-        <a:effectLst/>
-      </p:bgPr>
-    </p:bg>
     <p:spTree>
       <p:nvGrpSpPr>
         <p:cNvPr id="1" name=""/>
@@ -7968,325 +6613,30 @@
         <p:nvPr/>
       </p:nvGrpSpPr>
       <p:grpSpPr/>
-      <p:sp>
-        <p:nvSpPr>
-          <p:cNvPr id="3" name="장식"/>
-          <p:cNvSpPr/>
+      <p:pic>
+        <p:nvPicPr>
+          <p:cNvPr id="3" name="표지 그림" descr="talk-43.jpg"/>
+          <p:cNvPicPr>
+            <a:picLocks noChangeAspect="1"/>
+          </p:cNvPicPr>
           <p:nvPr/>
-        </p:nvSpPr>
-        <p:spPr>
-          <a:xfrm>
-            <a:off x="-274320" y="4251960"/>
-            <a:ext cx="12740335" cy="2743200"/>
-          </a:xfrm>
-          <a:prstGeom prst="wave">
-            <a:avLst/>
-          </a:prstGeom>
-          <a:solidFill>
-            <a:srgbClr val="F0D1D6"/>
-          </a:solidFill>
-          <a:ln>
-            <a:noFill/>
-          </a:ln>
-        </p:spPr>
-        <p:txBody>
-          <a:bodyPr rtlCol="0" anchor="ctr"/>
-          <a:lstStyle/>
-          <a:p>
-            <a:pPr algn="ctr"/>
-          </a:p>
-        </p:txBody>
-      </p:sp>
-      <p:sp>
-        <p:nvSpPr>
-          <p:cNvPr id="4" name="장식"/>
-          <p:cNvSpPr/>
-          <p:nvPr/>
-        </p:nvSpPr>
-        <p:spPr>
-          <a:xfrm>
-            <a:off x="-274320" y="5074920"/>
-            <a:ext cx="12740335" cy="2331720"/>
-          </a:xfrm>
-          <a:prstGeom prst="wave">
-            <a:avLst/>
-          </a:prstGeom>
-          <a:solidFill>
-            <a:srgbClr val="8D3443"/>
-          </a:solidFill>
-          <a:ln>
-            <a:noFill/>
-          </a:ln>
-        </p:spPr>
-        <p:txBody>
-          <a:bodyPr rtlCol="0" anchor="ctr"/>
-          <a:lstStyle/>
-          <a:p>
-            <a:pPr algn="ctr"/>
-          </a:p>
-        </p:txBody>
-      </p:sp>
-      <p:sp>
-        <p:nvSpPr>
-          <p:cNvPr id="5" name="장식"/>
-          <p:cNvSpPr/>
-          <p:nvPr/>
-        </p:nvSpPr>
-        <p:spPr>
-          <a:xfrm>
-            <a:off x="8543294" y="1234440"/>
-            <a:ext cx="822959" cy="1371600"/>
-          </a:xfrm>
-          <a:prstGeom prst="roundRect">
-            <a:avLst/>
-          </a:prstGeom>
-          <a:solidFill>
-            <a:srgbClr val="8D3443"/>
-          </a:solidFill>
-          <a:ln>
-            <a:noFill/>
-          </a:ln>
-        </p:spPr>
-        <p:txBody>
-          <a:bodyPr rtlCol="0" anchor="ctr"/>
-          <a:lstStyle/>
-          <a:p>
-            <a:pPr algn="ctr"/>
-          </a:p>
-        </p:txBody>
-      </p:sp>
-      <p:sp>
-        <p:nvSpPr>
-          <p:cNvPr id="6" name="장식"/>
-          <p:cNvSpPr/>
-          <p:nvPr/>
-        </p:nvSpPr>
-        <p:spPr>
-          <a:xfrm>
-            <a:off x="8749034" y="1097280"/>
-            <a:ext cx="411479" cy="137160"/>
+        </p:nvPicPr>
+        <p:blipFill>
+          <a:blip r:embed="rId2"/>
+          <a:stretch>
+            <a:fillRect/>
+          </a:stretch>
+        </p:blipFill>
+        <p:spPr>
+          <a:xfrm>
+            <a:off x="0" y="0"/>
+            <a:ext cx="12191695" cy="6858000"/>
           </a:xfrm>
           <a:prstGeom prst="rect">
             <a:avLst/>
           </a:prstGeom>
-          <a:solidFill>
-            <a:srgbClr val="3B9158"/>
-          </a:solidFill>
-          <a:ln>
-            <a:noFill/>
-          </a:ln>
-        </p:spPr>
-        <p:txBody>
-          <a:bodyPr rtlCol="0" anchor="ctr"/>
-          <a:lstStyle/>
-          <a:p>
-            <a:pPr algn="ctr"/>
-          </a:p>
-        </p:txBody>
-      </p:sp>
-      <p:sp>
-        <p:nvSpPr>
-          <p:cNvPr id="7" name="장식"/>
-          <p:cNvSpPr/>
-          <p:nvPr/>
-        </p:nvSpPr>
-        <p:spPr>
-          <a:xfrm>
-            <a:off x="8749034" y="2606040"/>
-            <a:ext cx="411479" cy="137160"/>
-          </a:xfrm>
-          <a:prstGeom prst="rect">
-            <a:avLst/>
-          </a:prstGeom>
-          <a:solidFill>
-            <a:srgbClr val="3B9158"/>
-          </a:solidFill>
-          <a:ln>
-            <a:noFill/>
-          </a:ln>
-        </p:spPr>
-        <p:txBody>
-          <a:bodyPr rtlCol="0" anchor="ctr"/>
-          <a:lstStyle/>
-          <a:p>
-            <a:pPr algn="ctr"/>
-          </a:p>
-        </p:txBody>
-      </p:sp>
-      <p:sp>
-        <p:nvSpPr>
-          <p:cNvPr id="8" name="장식"/>
-          <p:cNvSpPr/>
-          <p:nvPr/>
-        </p:nvSpPr>
-        <p:spPr>
-          <a:xfrm>
-            <a:off x="9585710" y="1728216"/>
-            <a:ext cx="822959" cy="1152144"/>
-          </a:xfrm>
-          <a:prstGeom prst="roundRect">
-            <a:avLst/>
-          </a:prstGeom>
-          <a:solidFill>
-            <a:srgbClr val="F0D1D6"/>
-          </a:solidFill>
-          <a:ln>
-            <a:noFill/>
-          </a:ln>
-        </p:spPr>
-        <p:txBody>
-          <a:bodyPr rtlCol="0" anchor="ctr"/>
-          <a:lstStyle/>
-          <a:p>
-            <a:pPr algn="ctr"/>
-          </a:p>
-        </p:txBody>
-      </p:sp>
-      <p:sp>
-        <p:nvSpPr>
-          <p:cNvPr id="9" name="장식"/>
-          <p:cNvSpPr/>
-          <p:nvPr/>
-        </p:nvSpPr>
-        <p:spPr>
-          <a:xfrm>
-            <a:off x="9791450" y="1591056"/>
-            <a:ext cx="411479" cy="137160"/>
-          </a:xfrm>
-          <a:prstGeom prst="rect">
-            <a:avLst/>
-          </a:prstGeom>
-          <a:solidFill>
-            <a:srgbClr val="3B9158"/>
-          </a:solidFill>
-          <a:ln>
-            <a:noFill/>
-          </a:ln>
-        </p:spPr>
-        <p:txBody>
-          <a:bodyPr rtlCol="0" anchor="ctr"/>
-          <a:lstStyle/>
-          <a:p>
-            <a:pPr algn="ctr"/>
-          </a:p>
-        </p:txBody>
-      </p:sp>
-      <p:sp>
-        <p:nvSpPr>
-          <p:cNvPr id="10" name="장식"/>
-          <p:cNvSpPr/>
-          <p:nvPr/>
-        </p:nvSpPr>
-        <p:spPr>
-          <a:xfrm>
-            <a:off x="9791450" y="2880360"/>
-            <a:ext cx="411479" cy="137160"/>
-          </a:xfrm>
-          <a:prstGeom prst="rect">
-            <a:avLst/>
-          </a:prstGeom>
-          <a:solidFill>
-            <a:srgbClr val="3B9158"/>
-          </a:solidFill>
-          <a:ln>
-            <a:noFill/>
-          </a:ln>
-        </p:spPr>
-        <p:txBody>
-          <a:bodyPr rtlCol="0" anchor="ctr"/>
-          <a:lstStyle/>
-          <a:p>
-            <a:pPr algn="ctr"/>
-          </a:p>
-        </p:txBody>
-      </p:sp>
-      <p:sp>
-        <p:nvSpPr>
-          <p:cNvPr id="11" name="장식"/>
-          <p:cNvSpPr/>
-          <p:nvPr/>
-        </p:nvSpPr>
-        <p:spPr>
-          <a:xfrm>
-            <a:off x="10628126" y="1234440"/>
-            <a:ext cx="822959" cy="1371600"/>
-          </a:xfrm>
-          <a:prstGeom prst="roundRect">
-            <a:avLst/>
-          </a:prstGeom>
-          <a:solidFill>
-            <a:srgbClr val="3B9158"/>
-          </a:solidFill>
-          <a:ln>
-            <a:noFill/>
-          </a:ln>
-        </p:spPr>
-        <p:txBody>
-          <a:bodyPr rtlCol="0" anchor="ctr"/>
-          <a:lstStyle/>
-          <a:p>
-            <a:pPr algn="ctr"/>
-          </a:p>
-        </p:txBody>
-      </p:sp>
-      <p:sp>
-        <p:nvSpPr>
-          <p:cNvPr id="12" name="장식"/>
-          <p:cNvSpPr/>
-          <p:nvPr/>
-        </p:nvSpPr>
-        <p:spPr>
-          <a:xfrm>
-            <a:off x="10833866" y="1097280"/>
-            <a:ext cx="411479" cy="137160"/>
-          </a:xfrm>
-          <a:prstGeom prst="rect">
-            <a:avLst/>
-          </a:prstGeom>
-          <a:solidFill>
-            <a:srgbClr val="8D3443"/>
-          </a:solidFill>
-          <a:ln>
-            <a:noFill/>
-          </a:ln>
-        </p:spPr>
-        <p:txBody>
-          <a:bodyPr rtlCol="0" anchor="ctr"/>
-          <a:lstStyle/>
-          <a:p>
-            <a:pPr algn="ctr"/>
-          </a:p>
-        </p:txBody>
-      </p:sp>
-      <p:sp>
-        <p:nvSpPr>
-          <p:cNvPr id="13" name="장식"/>
-          <p:cNvSpPr/>
-          <p:nvPr/>
-        </p:nvSpPr>
-        <p:spPr>
-          <a:xfrm>
-            <a:off x="10833866" y="2606040"/>
-            <a:ext cx="411479" cy="137160"/>
-          </a:xfrm>
-          <a:prstGeom prst="rect">
-            <a:avLst/>
-          </a:prstGeom>
-          <a:solidFill>
-            <a:srgbClr val="8D3443"/>
-          </a:solidFill>
-          <a:ln>
-            <a:noFill/>
-          </a:ln>
-        </p:spPr>
-        <p:txBody>
-          <a:bodyPr rtlCol="0" anchor="ctr"/>
-          <a:lstStyle/>
-          <a:p>
-            <a:pPr algn="ctr"/>
-          </a:p>
-        </p:txBody>
-      </p:sp>
+        </p:spPr>
+      </p:pic>
       <p:sp>
         <p:nvSpPr>
           <p:cNvPr id="2" name="Title 1"/>
@@ -8299,8 +6649,8 @@
         </p:nvSpPr>
         <p:spPr>
           <a:xfrm>
-            <a:off x="975335" y="1371600"/>
-            <a:ext cx="7558851" cy="1463040"/>
+            <a:off x="853418" y="2057400"/>
+            <a:ext cx="6095847" cy="1554480"/>
           </a:xfrm>
         </p:spPr>
         <p:txBody>
@@ -8327,14 +6677,14 @@
       </p:sp>
       <p:sp>
         <p:nvSpPr>
-          <p:cNvPr id="14" name="한 줄 문구"/>
+          <p:cNvPr id="4" name="한 줄 문구"/>
           <p:cNvSpPr txBox="1"/>
           <p:nvPr/>
         </p:nvSpPr>
         <p:spPr>
           <a:xfrm>
-            <a:off x="975335" y="2926080"/>
-            <a:ext cx="7315017" cy="822960"/>
+            <a:off x="853418" y="3749039"/>
+            <a:ext cx="6095847" cy="822960"/>
           </a:xfrm>
           <a:prstGeom prst="rect">
             <a:avLst/>
@@ -8358,21 +6708,21 @@
                   <a:srgbClr val="431920"/>
                 </a:solidFill>
               </a:rPr>
-              <a:t>들어 주셔서 고맙습니다</a:t>
-            </a:r>
-          </a:p>
-        </p:txBody>
-      </p:sp>
-      <p:sp>
-        <p:nvSpPr>
-          <p:cNvPr id="15" name="안내 문구"/>
+              <a:t>끝까지 들어 주셔서 고맙습니다</a:t>
+            </a:r>
+          </a:p>
+        </p:txBody>
+      </p:sp>
+      <p:sp>
+        <p:nvSpPr>
+          <p:cNvPr id="5" name="안내 문구"/>
           <p:cNvSpPr txBox="1"/>
           <p:nvPr/>
         </p:nvSpPr>
         <p:spPr>
           <a:xfrm>
-            <a:off x="975335" y="3794760"/>
-            <a:ext cx="7315017" cy="914400"/>
+            <a:off x="853418" y="4617720"/>
+            <a:ext cx="6095847" cy="914400"/>
           </a:xfrm>
           <a:prstGeom prst="rect">
             <a:avLst/>

--- a/public/fun/pack/pptx/talk/발표템플릿_43_업무보고_설날세배.pptx
+++ b/public/fun/pack/pptx/talk/발표템플릿_43_업무보고_설날세배.pptx
@@ -3286,6 +3286,14 @@
 <file path=ppt/slides/slide1.xml><?xml version="1.0" encoding="utf-8"?>
 <p:sld xmlns:a="http://schemas.openxmlformats.org/drawingml/2006/main" xmlns:p="http://schemas.openxmlformats.org/presentationml/2006/main" xmlns:r="http://schemas.openxmlformats.org/officeDocument/2006/relationships">
   <p:cSld>
+    <p:bg>
+      <p:bgPr>
+        <a:solidFill>
+          <a:srgbClr val="F6D5DA"/>
+        </a:solidFill>
+        <a:effectLst/>
+      </p:bgPr>
+    </p:bg>
     <p:spTree>
       <p:nvGrpSpPr>
         <p:cNvPr id="1" name=""/>
@@ -3293,30 +3301,106 @@
         <p:nvPr/>
       </p:nvGrpSpPr>
       <p:grpSpPr/>
-      <p:pic>
-        <p:nvPicPr>
-          <p:cNvPr id="3" name="표지 그림" descr="talk-43.jpg"/>
-          <p:cNvPicPr>
-            <a:picLocks noChangeAspect="1"/>
-          </p:cNvPicPr>
+      <p:sp>
+        <p:nvSpPr>
+          <p:cNvPr id="3" name="장식"/>
+          <p:cNvSpPr/>
           <p:nvPr/>
-        </p:nvPicPr>
-        <p:blipFill>
-          <a:blip r:embed="rId2"/>
-          <a:stretch>
-            <a:fillRect/>
-          </a:stretch>
-        </p:blipFill>
-        <p:spPr>
-          <a:xfrm>
-            <a:off x="0" y="0"/>
-            <a:ext cx="12191695" cy="6858000"/>
+        </p:nvSpPr>
+        <p:spPr>
+          <a:xfrm>
+            <a:off x="7071183" y="960120"/>
+            <a:ext cx="3657508" cy="4526280"/>
+          </a:xfrm>
+          <a:prstGeom prst="roundRect">
+            <a:avLst>
+              <a:gd name="adj" fmla="val 4000"/>
+            </a:avLst>
+          </a:prstGeom>
+          <a:solidFill>
+            <a:srgbClr val="FFFFFF"/>
+          </a:solidFill>
+          <a:ln>
+            <a:noFill/>
+          </a:ln>
+        </p:spPr>
+        <p:txBody>
+          <a:bodyPr rtlCol="0" anchor="ctr"/>
+          <a:lstStyle/>
+          <a:p>
+            <a:pPr algn="ctr"/>
+          </a:p>
+        </p:txBody>
+      </p:sp>
+      <p:sp>
+        <p:nvSpPr>
+          <p:cNvPr id="4" name="장식"/>
+          <p:cNvSpPr/>
+          <p:nvPr/>
+        </p:nvSpPr>
+        <p:spPr>
+          <a:xfrm>
+            <a:off x="7558851" y="1234439"/>
+            <a:ext cx="3657508" cy="4526280"/>
+          </a:xfrm>
+          <a:prstGeom prst="roundRect">
+            <a:avLst>
+              <a:gd name="adj" fmla="val 4000"/>
+            </a:avLst>
+          </a:prstGeom>
+          <a:noFill/>
+          <a:ln w="9525">
+            <a:solidFill>
+              <a:srgbClr val="26231F"/>
+            </a:solidFill>
+          </a:ln>
+        </p:spPr>
+        <p:txBody>
+          <a:bodyPr rtlCol="0" anchor="ctr"/>
+          <a:lstStyle/>
+          <a:p>
+            <a:pPr algn="ctr"/>
+          </a:p>
+        </p:txBody>
+      </p:sp>
+      <p:sp>
+        <p:nvSpPr>
+          <p:cNvPr id="5" name="라벨"/>
+          <p:cNvSpPr txBox="1"/>
+          <p:nvPr/>
+        </p:nvSpPr>
+        <p:spPr>
+          <a:xfrm>
+            <a:off x="822960" y="2148840"/>
+            <a:ext cx="5608179" cy="274320"/>
           </a:xfrm>
           <a:prstGeom prst="rect">
             <a:avLst/>
           </a:prstGeom>
-        </p:spPr>
-      </p:pic>
+          <a:noFill/>
+        </p:spPr>
+        <p:txBody>
+          <a:bodyPr wrap="square" lIns="54864" rIns="54864" tIns="27432" bIns="27432" anchor="t">
+            <a:noAutofit/>
+          </a:bodyPr>
+          <a:lstStyle/>
+          <a:p>
+            <a:pPr algn="l">
+              <a:lnSpc>
+                <a:spcPct val="115000"/>
+              </a:lnSpc>
+            </a:pPr>
+            <a:r>
+              <a:rPr sz="1000" b="1" i="0" spc="250">
+                <a:solidFill>
+                  <a:srgbClr val="26231F"/>
+                </a:solidFill>
+              </a:rPr>
+              <a:t>PRESENTATION</a:t>
+            </a:r>
+          </a:p>
+        </p:txBody>
+      </p:sp>
       <p:sp>
         <p:nvSpPr>
           <p:cNvPr id="2" name="Title 1"/>
@@ -3329,8 +3413,8 @@
         </p:nvSpPr>
         <p:spPr>
           <a:xfrm>
-            <a:off x="853418" y="2057400"/>
-            <a:ext cx="6095847" cy="1554480"/>
+            <a:off x="822960" y="2606040"/>
+            <a:ext cx="5608179" cy="1188720"/>
           </a:xfrm>
         </p:spPr>
         <p:txBody>
@@ -3345,9 +3429,9 @@
               </a:lnSpc>
             </a:pPr>
             <a:r>
-              <a:rPr sz="3600" b="1" i="0">
+              <a:rPr sz="4000" b="1" i="0">
                 <a:solidFill>
-                  <a:srgbClr val="431920"/>
+                  <a:srgbClr val="26231F"/>
                 </a:solidFill>
               </a:rPr>
               <a:t>발표 제목을 입력하세요</a:t>
@@ -3357,14 +3441,14 @@
       </p:sp>
       <p:sp>
         <p:nvSpPr>
-          <p:cNvPr id="4" name="한 줄 문구"/>
+          <p:cNvPr id="6" name="한 줄 문구"/>
           <p:cNvSpPr txBox="1"/>
           <p:nvPr/>
         </p:nvSpPr>
         <p:spPr>
           <a:xfrm>
-            <a:off x="853418" y="3749039"/>
-            <a:ext cx="6095847" cy="822960"/>
+            <a:off x="822960" y="3886200"/>
+            <a:ext cx="5608179" cy="822960"/>
           </a:xfrm>
           <a:prstGeom prst="rect">
             <a:avLst/>
@@ -3383,26 +3467,26 @@
               </a:lnSpc>
             </a:pPr>
             <a:r>
-              <a:rPr sz="1700" b="0" i="1">
+              <a:rPr sz="1700" b="0" i="0">
                 <a:solidFill>
-                  <a:srgbClr val="431920"/>
+                  <a:srgbClr val="26231F"/>
                 </a:solidFill>
               </a:rPr>
-              <a:t>연말 전에 마무리할 일 목록입니다</a:t>
-            </a:r>
-          </a:p>
-        </p:txBody>
-      </p:sp>
-      <p:sp>
-        <p:nvSpPr>
-          <p:cNvPr id="5" name="안내 문구"/>
+              <a:t>마감 전에 마무리할 일 목록입니다</a:t>
+            </a:r>
+          </a:p>
+        </p:txBody>
+      </p:sp>
+      <p:sp>
+        <p:nvSpPr>
+          <p:cNvPr id="7" name="안내 문구"/>
           <p:cNvSpPr txBox="1"/>
           <p:nvPr/>
         </p:nvSpPr>
         <p:spPr>
           <a:xfrm>
-            <a:off x="853418" y="4617720"/>
-            <a:ext cx="6095847" cy="914400"/>
+            <a:off x="822960" y="4754880"/>
+            <a:ext cx="5608179" cy="914400"/>
           </a:xfrm>
           <a:prstGeom prst="rect">
             <a:avLst/>
@@ -3423,7 +3507,7 @@
             <a:r>
               <a:rPr sz="1400" b="0" i="0">
                 <a:solidFill>
-                  <a:srgbClr val="666666"/>
+                  <a:srgbClr val="26231F"/>
                 </a:solidFill>
               </a:rPr>
               <a:t>업무 보고 · 발표자 이름</a:t>
@@ -3438,10 +3522,10 @@
             <a:r>
               <a:rPr sz="1400" b="0" i="0">
                 <a:solidFill>
-                  <a:srgbClr val="666666"/>
+                  <a:srgbClr val="26231F"/>
                 </a:solidFill>
               </a:rPr>
-              <a:t>2027. 00. 00</a:t>
+              <a:t>날짜 입력</a:t>
             </a:r>
           </a:p>
         </p:txBody>
@@ -3480,43 +3564,110 @@
         </p:nvSpPr>
         <p:spPr>
           <a:xfrm>
-            <a:off x="-182880" y="6144768"/>
-            <a:ext cx="12557455" cy="731520"/>
+            <a:off x="0" y="6565392"/>
+            <a:ext cx="12191695" cy="292608"/>
+          </a:xfrm>
+          <a:prstGeom prst="rect">
+            <a:avLst/>
+          </a:prstGeom>
+          <a:solidFill>
+            <a:srgbClr val="EBADB8"/>
+          </a:solidFill>
+          <a:ln>
+            <a:noFill/>
+          </a:ln>
+        </p:spPr>
+        <p:txBody>
+          <a:bodyPr rtlCol="0" anchor="ctr"/>
+          <a:lstStyle/>
+          <a:p>
+            <a:pPr algn="ctr"/>
+          </a:p>
+        </p:txBody>
+      </p:sp>
+      <p:sp>
+        <p:nvSpPr>
+          <p:cNvPr id="4" name="장식"/>
+          <p:cNvSpPr/>
+          <p:nvPr/>
+        </p:nvSpPr>
+        <p:spPr>
+          <a:xfrm>
+            <a:off x="10180015" y="-1645920"/>
+            <a:ext cx="3474720" cy="3474720"/>
+          </a:xfrm>
+          <a:prstGeom prst="ellipse">
+            <a:avLst/>
+          </a:prstGeom>
+          <a:solidFill>
+            <a:srgbClr val="EBADB8"/>
+          </a:solidFill>
+          <a:ln>
+            <a:noFill/>
+          </a:ln>
+        </p:spPr>
+        <p:txBody>
+          <a:bodyPr rtlCol="0" anchor="ctr"/>
+          <a:lstStyle/>
+          <a:p>
+            <a:pPr algn="ctr"/>
+          </a:p>
+        </p:txBody>
+      </p:sp>
+      <p:sp>
+        <p:nvSpPr>
+          <p:cNvPr id="5" name="상단 라벨"/>
+          <p:cNvSpPr txBox="1"/>
+          <p:nvPr/>
+        </p:nvSpPr>
+        <p:spPr>
+          <a:xfrm>
+            <a:off x="640080" y="274320"/>
+            <a:ext cx="5486400" cy="274320"/>
+          </a:xfrm>
+          <a:prstGeom prst="rect">
+            <a:avLst/>
+          </a:prstGeom>
+          <a:noFill/>
+        </p:spPr>
+        <p:txBody>
+          <a:bodyPr wrap="square" lIns="54864" rIns="54864" tIns="27432" bIns="27432" anchor="ctr">
+            <a:noAutofit/>
+          </a:bodyPr>
+          <a:lstStyle/>
+          <a:p>
+            <a:pPr algn="l">
+              <a:lnSpc>
+                <a:spcPct val="115000"/>
+              </a:lnSpc>
+            </a:pPr>
+            <a:r>
+              <a:rPr sz="900" b="1" i="0" spc="250">
+                <a:solidFill>
+                  <a:srgbClr val="26231F"/>
+                </a:solidFill>
+              </a:rPr>
+              <a:t>PRESENTATION</a:t>
+            </a:r>
+          </a:p>
+        </p:txBody>
+      </p:sp>
+      <p:sp>
+        <p:nvSpPr>
+          <p:cNvPr id="6" name="포인트"/>
+          <p:cNvSpPr/>
+          <p:nvPr/>
+        </p:nvSpPr>
+        <p:spPr>
+          <a:xfrm>
+            <a:off x="11048695" y="502919"/>
+            <a:ext cx="274320" cy="109728"/>
           </a:xfrm>
           <a:prstGeom prst="wave">
             <a:avLst/>
           </a:prstGeom>
           <a:solidFill>
-            <a:srgbClr val="F0D1D6"/>
-          </a:solidFill>
-          <a:ln>
-            <a:noFill/>
-          </a:ln>
-        </p:spPr>
-        <p:txBody>
-          <a:bodyPr rtlCol="0" anchor="ctr"/>
-          <a:lstStyle/>
-          <a:p>
-            <a:pPr algn="ctr"/>
-          </a:p>
-        </p:txBody>
-      </p:sp>
-      <p:sp>
-        <p:nvSpPr>
-          <p:cNvPr id="4" name="장식"/>
-          <p:cNvSpPr/>
-          <p:nvPr/>
-        </p:nvSpPr>
-        <p:spPr>
-          <a:xfrm>
-            <a:off x="-182880" y="6400800"/>
-            <a:ext cx="12557455" cy="502920"/>
-          </a:xfrm>
-          <a:prstGeom prst="wave">
-            <a:avLst/>
-          </a:prstGeom>
-          <a:solidFill>
-            <a:srgbClr val="8D3443"/>
+            <a:srgbClr val="FFFFFF"/>
           </a:solidFill>
           <a:ln>
             <a:noFill/>
@@ -3542,8 +3693,8 @@
         </p:nvSpPr>
         <p:spPr>
           <a:xfrm>
-            <a:off x="640080" y="457200"/>
-            <a:ext cx="9722815" cy="868680"/>
+            <a:off x="640080" y="658368"/>
+            <a:ext cx="9082735" cy="868680"/>
           </a:xfrm>
         </p:spPr>
         <p:txBody>
@@ -3560,7 +3711,7 @@
             <a:r>
               <a:rPr sz="3000" b="1" i="0">
                 <a:solidFill>
-                  <a:srgbClr val="431920"/>
+                  <a:srgbClr val="26231F"/>
                 </a:solidFill>
               </a:rPr>
               <a:t>목차</a:t>
@@ -3570,27 +3721,25 @@
       </p:sp>
       <p:sp>
         <p:nvSpPr>
-          <p:cNvPr id="5" name="줄 1"/>
+          <p:cNvPr id="7" name="줄 1"/>
           <p:cNvSpPr/>
           <p:nvPr/>
         </p:nvSpPr>
         <p:spPr>
           <a:xfrm>
-            <a:off x="640080" y="1554480"/>
+            <a:off x="640080" y="1783080"/>
             <a:ext cx="10911535" cy="914400"/>
           </a:xfrm>
           <a:prstGeom prst="roundRect">
             <a:avLst>
-              <a:gd name="adj" fmla="val 8000"/>
+              <a:gd name="adj" fmla="val 4000"/>
             </a:avLst>
           </a:prstGeom>
           <a:solidFill>
-            <a:srgbClr val="F9F0F2"/>
+            <a:srgbClr val="FBECEF"/>
           </a:solidFill>
-          <a:ln w="12700">
-            <a:solidFill>
-              <a:srgbClr val="F0D1D6"/>
-            </a:solidFill>
+          <a:ln>
+            <a:noFill/>
           </a:ln>
         </p:spPr>
         <p:txBody>
@@ -3603,20 +3752,49 @@
       </p:sp>
       <p:sp>
         <p:nvSpPr>
-          <p:cNvPr id="6" name="번호 1"/>
+          <p:cNvPr id="8" name="포인트 막대"/>
           <p:cNvSpPr/>
           <p:nvPr/>
         </p:nvSpPr>
         <p:spPr>
           <a:xfrm>
-            <a:off x="822959" y="1783080"/>
+            <a:off x="640080" y="1892807"/>
+            <a:ext cx="54864" cy="694944"/>
+          </a:xfrm>
+          <a:prstGeom prst="rect">
+            <a:avLst/>
+          </a:prstGeom>
+          <a:solidFill>
+            <a:srgbClr val="E198A4"/>
+          </a:solidFill>
+          <a:ln>
+            <a:noFill/>
+          </a:ln>
+        </p:spPr>
+        <p:txBody>
+          <a:bodyPr rtlCol="0" anchor="ctr"/>
+          <a:lstStyle/>
+          <a:p>
+            <a:pPr algn="ctr"/>
+          </a:p>
+        </p:txBody>
+      </p:sp>
+      <p:sp>
+        <p:nvSpPr>
+          <p:cNvPr id="9" name="번호 1"/>
+          <p:cNvSpPr/>
+          <p:nvPr/>
+        </p:nvSpPr>
+        <p:spPr>
+          <a:xfrm>
+            <a:off x="822959" y="2011680"/>
             <a:ext cx="457200" cy="457200"/>
           </a:xfrm>
           <a:prstGeom prst="ellipse">
             <a:avLst/>
           </a:prstGeom>
           <a:solidFill>
-            <a:srgbClr val="8D3443"/>
+            <a:srgbClr val="EAC7B8"/>
           </a:solidFill>
           <a:ln>
             <a:noFill/>
@@ -3636,7 +3814,7 @@
             <a:r>
               <a:rPr sz="1600" b="1" i="0">
                 <a:solidFill>
-                  <a:srgbClr val="FFFFFF"/>
+                  <a:srgbClr val="26231F"/>
                 </a:solidFill>
               </a:rPr>
               <a:t>1</a:t>
@@ -3646,13 +3824,13 @@
       </p:sp>
       <p:sp>
         <p:nvSpPr>
-          <p:cNvPr id="7" name="TextBox 6"/>
+          <p:cNvPr id="10" name="TextBox 9"/>
           <p:cNvSpPr txBox="1"/>
           <p:nvPr/>
         </p:nvSpPr>
         <p:spPr>
           <a:xfrm>
-            <a:off x="1508760" y="1600200"/>
+            <a:off x="1508760" y="1828800"/>
             <a:ext cx="2743200" cy="822960"/>
           </a:xfrm>
           <a:prstGeom prst="rect">
@@ -3674,7 +3852,7 @@
             <a:r>
               <a:rPr sz="1800" b="1" i="0">
                 <a:solidFill>
-                  <a:srgbClr val="431920"/>
+                  <a:srgbClr val="49272D"/>
                 </a:solidFill>
               </a:rPr>
               <a:t>추진 경과</a:t>
@@ -3684,13 +3862,13 @@
       </p:sp>
       <p:sp>
         <p:nvSpPr>
-          <p:cNvPr id="8" name="TextBox 7"/>
+          <p:cNvPr id="11" name="TextBox 10"/>
           <p:cNvSpPr txBox="1"/>
           <p:nvPr/>
         </p:nvSpPr>
         <p:spPr>
           <a:xfrm>
-            <a:off x="4297680" y="1600200"/>
+            <a:off x="4297680" y="1828800"/>
             <a:ext cx="7071055" cy="822960"/>
           </a:xfrm>
           <a:prstGeom prst="rect">
@@ -3712,7 +3890,7 @@
             <a:r>
               <a:rPr sz="1500" b="0" i="0">
                 <a:solidFill>
-                  <a:srgbClr val="2B2B2B"/>
+                  <a:srgbClr val="26231F"/>
                 </a:solidFill>
               </a:rPr>
               <a:t>한 줄로 내용을 적어 주세요</a:t>
@@ -3722,27 +3900,25 @@
       </p:sp>
       <p:sp>
         <p:nvSpPr>
-          <p:cNvPr id="9" name="줄 2"/>
+          <p:cNvPr id="12" name="줄 2"/>
           <p:cNvSpPr/>
           <p:nvPr/>
         </p:nvSpPr>
         <p:spPr>
           <a:xfrm>
-            <a:off x="640080" y="2606039"/>
+            <a:off x="640080" y="2834639"/>
             <a:ext cx="10911535" cy="914400"/>
           </a:xfrm>
           <a:prstGeom prst="roundRect">
             <a:avLst>
-              <a:gd name="adj" fmla="val 8000"/>
+              <a:gd name="adj" fmla="val 4000"/>
             </a:avLst>
           </a:prstGeom>
           <a:solidFill>
-            <a:srgbClr val="F9F0F2"/>
+            <a:srgbClr val="FBECEF"/>
           </a:solidFill>
-          <a:ln w="12700">
-            <a:solidFill>
-              <a:srgbClr val="F0D1D6"/>
-            </a:solidFill>
+          <a:ln>
+            <a:noFill/>
           </a:ln>
         </p:spPr>
         <p:txBody>
@@ -3755,20 +3931,49 @@
       </p:sp>
       <p:sp>
         <p:nvSpPr>
-          <p:cNvPr id="10" name="번호 2"/>
+          <p:cNvPr id="13" name="포인트 막대"/>
           <p:cNvSpPr/>
           <p:nvPr/>
         </p:nvSpPr>
         <p:spPr>
           <a:xfrm>
-            <a:off x="822959" y="2834639"/>
+            <a:off x="640080" y="2944368"/>
+            <a:ext cx="54864" cy="694944"/>
+          </a:xfrm>
+          <a:prstGeom prst="rect">
+            <a:avLst/>
+          </a:prstGeom>
+          <a:solidFill>
+            <a:srgbClr val="E198A4"/>
+          </a:solidFill>
+          <a:ln>
+            <a:noFill/>
+          </a:ln>
+        </p:spPr>
+        <p:txBody>
+          <a:bodyPr rtlCol="0" anchor="ctr"/>
+          <a:lstStyle/>
+          <a:p>
+            <a:pPr algn="ctr"/>
+          </a:p>
+        </p:txBody>
+      </p:sp>
+      <p:sp>
+        <p:nvSpPr>
+          <p:cNvPr id="14" name="번호 2"/>
+          <p:cNvSpPr/>
+          <p:nvPr/>
+        </p:nvSpPr>
+        <p:spPr>
+          <a:xfrm>
+            <a:off x="822959" y="3063239"/>
             <a:ext cx="457200" cy="457200"/>
           </a:xfrm>
           <a:prstGeom prst="ellipse">
             <a:avLst/>
           </a:prstGeom>
           <a:solidFill>
-            <a:srgbClr val="8D3443"/>
+            <a:srgbClr val="EAC7B8"/>
           </a:solidFill>
           <a:ln>
             <a:noFill/>
@@ -3788,7 +3993,7 @@
             <a:r>
               <a:rPr sz="1600" b="1" i="0">
                 <a:solidFill>
-                  <a:srgbClr val="FFFFFF"/>
+                  <a:srgbClr val="26231F"/>
                 </a:solidFill>
               </a:rPr>
               <a:t>2</a:t>
@@ -3798,13 +4003,13 @@
       </p:sp>
       <p:sp>
         <p:nvSpPr>
-          <p:cNvPr id="11" name="TextBox 10"/>
+          <p:cNvPr id="15" name="TextBox 14"/>
           <p:cNvSpPr txBox="1"/>
           <p:nvPr/>
         </p:nvSpPr>
         <p:spPr>
           <a:xfrm>
-            <a:off x="1508760" y="2651759"/>
+            <a:off x="1508760" y="2880359"/>
             <a:ext cx="2743200" cy="822960"/>
           </a:xfrm>
           <a:prstGeom prst="rect">
@@ -3826,7 +4031,7 @@
             <a:r>
               <a:rPr sz="1800" b="1" i="0">
                 <a:solidFill>
-                  <a:srgbClr val="431920"/>
+                  <a:srgbClr val="49272D"/>
                 </a:solidFill>
               </a:rPr>
               <a:t>주요 성과</a:t>
@@ -3836,13 +4041,13 @@
       </p:sp>
       <p:sp>
         <p:nvSpPr>
-          <p:cNvPr id="12" name="TextBox 11"/>
+          <p:cNvPr id="16" name="TextBox 15"/>
           <p:cNvSpPr txBox="1"/>
           <p:nvPr/>
         </p:nvSpPr>
         <p:spPr>
           <a:xfrm>
-            <a:off x="4297680" y="2651759"/>
+            <a:off x="4297680" y="2880359"/>
             <a:ext cx="7071055" cy="822960"/>
           </a:xfrm>
           <a:prstGeom prst="rect">
@@ -3864,7 +4069,7 @@
             <a:r>
               <a:rPr sz="1500" b="0" i="0">
                 <a:solidFill>
-                  <a:srgbClr val="2B2B2B"/>
+                  <a:srgbClr val="26231F"/>
                 </a:solidFill>
               </a:rPr>
               <a:t>한 줄로 내용을 적어 주세요</a:t>
@@ -3874,27 +4079,25 @@
       </p:sp>
       <p:sp>
         <p:nvSpPr>
-          <p:cNvPr id="13" name="줄 3"/>
+          <p:cNvPr id="17" name="줄 3"/>
           <p:cNvSpPr/>
           <p:nvPr/>
         </p:nvSpPr>
         <p:spPr>
           <a:xfrm>
-            <a:off x="640080" y="3657600"/>
+            <a:off x="640080" y="3886200"/>
             <a:ext cx="10911535" cy="914400"/>
           </a:xfrm>
           <a:prstGeom prst="roundRect">
             <a:avLst>
-              <a:gd name="adj" fmla="val 8000"/>
+              <a:gd name="adj" fmla="val 4000"/>
             </a:avLst>
           </a:prstGeom>
           <a:solidFill>
-            <a:srgbClr val="F9F0F2"/>
+            <a:srgbClr val="FBECEF"/>
           </a:solidFill>
-          <a:ln w="12700">
-            <a:solidFill>
-              <a:srgbClr val="F0D1D6"/>
-            </a:solidFill>
+          <a:ln>
+            <a:noFill/>
           </a:ln>
         </p:spPr>
         <p:txBody>
@@ -3907,20 +4110,49 @@
       </p:sp>
       <p:sp>
         <p:nvSpPr>
-          <p:cNvPr id="14" name="번호 3"/>
+          <p:cNvPr id="18" name="포인트 막대"/>
           <p:cNvSpPr/>
           <p:nvPr/>
         </p:nvSpPr>
         <p:spPr>
           <a:xfrm>
-            <a:off x="822959" y="3886200"/>
+            <a:off x="640080" y="3995928"/>
+            <a:ext cx="54864" cy="694944"/>
+          </a:xfrm>
+          <a:prstGeom prst="rect">
+            <a:avLst/>
+          </a:prstGeom>
+          <a:solidFill>
+            <a:srgbClr val="E198A4"/>
+          </a:solidFill>
+          <a:ln>
+            <a:noFill/>
+          </a:ln>
+        </p:spPr>
+        <p:txBody>
+          <a:bodyPr rtlCol="0" anchor="ctr"/>
+          <a:lstStyle/>
+          <a:p>
+            <a:pPr algn="ctr"/>
+          </a:p>
+        </p:txBody>
+      </p:sp>
+      <p:sp>
+        <p:nvSpPr>
+          <p:cNvPr id="19" name="번호 3"/>
+          <p:cNvSpPr/>
+          <p:nvPr/>
+        </p:nvSpPr>
+        <p:spPr>
+          <a:xfrm>
+            <a:off x="822959" y="4114800"/>
             <a:ext cx="457200" cy="457200"/>
           </a:xfrm>
           <a:prstGeom prst="ellipse">
             <a:avLst/>
           </a:prstGeom>
           <a:solidFill>
-            <a:srgbClr val="8D3443"/>
+            <a:srgbClr val="EAC7B8"/>
           </a:solidFill>
           <a:ln>
             <a:noFill/>
@@ -3940,7 +4172,7 @@
             <a:r>
               <a:rPr sz="1600" b="1" i="0">
                 <a:solidFill>
-                  <a:srgbClr val="FFFFFF"/>
+                  <a:srgbClr val="26231F"/>
                 </a:solidFill>
               </a:rPr>
               <a:t>3</a:t>
@@ -3950,13 +4182,13 @@
       </p:sp>
       <p:sp>
         <p:nvSpPr>
-          <p:cNvPr id="15" name="TextBox 14"/>
+          <p:cNvPr id="20" name="TextBox 19"/>
           <p:cNvSpPr txBox="1"/>
           <p:nvPr/>
         </p:nvSpPr>
         <p:spPr>
           <a:xfrm>
-            <a:off x="1508760" y="3703320"/>
+            <a:off x="1508760" y="3931920"/>
             <a:ext cx="2743200" cy="822960"/>
           </a:xfrm>
           <a:prstGeom prst="rect">
@@ -3978,7 +4210,7 @@
             <a:r>
               <a:rPr sz="1800" b="1" i="0">
                 <a:solidFill>
-                  <a:srgbClr val="431920"/>
+                  <a:srgbClr val="49272D"/>
                 </a:solidFill>
               </a:rPr>
               <a:t>이슈와 대응</a:t>
@@ -3988,13 +4220,13 @@
       </p:sp>
       <p:sp>
         <p:nvSpPr>
-          <p:cNvPr id="16" name="TextBox 15"/>
+          <p:cNvPr id="21" name="TextBox 20"/>
           <p:cNvSpPr txBox="1"/>
           <p:nvPr/>
         </p:nvSpPr>
         <p:spPr>
           <a:xfrm>
-            <a:off x="4297680" y="3703320"/>
+            <a:off x="4297680" y="3931920"/>
             <a:ext cx="7071055" cy="822960"/>
           </a:xfrm>
           <a:prstGeom prst="rect">
@@ -4016,7 +4248,7 @@
             <a:r>
               <a:rPr sz="1500" b="0" i="0">
                 <a:solidFill>
-                  <a:srgbClr val="2B2B2B"/>
+                  <a:srgbClr val="26231F"/>
                 </a:solidFill>
               </a:rPr>
               <a:t>한 줄로 내용을 적어 주세요</a:t>
@@ -4026,27 +4258,25 @@
       </p:sp>
       <p:sp>
         <p:nvSpPr>
-          <p:cNvPr id="17" name="줄 4"/>
+          <p:cNvPr id="22" name="줄 4"/>
           <p:cNvSpPr/>
           <p:nvPr/>
         </p:nvSpPr>
         <p:spPr>
           <a:xfrm>
-            <a:off x="640080" y="4709159"/>
+            <a:off x="640080" y="4937759"/>
             <a:ext cx="10911535" cy="914400"/>
           </a:xfrm>
           <a:prstGeom prst="roundRect">
             <a:avLst>
-              <a:gd name="adj" fmla="val 8000"/>
+              <a:gd name="adj" fmla="val 4000"/>
             </a:avLst>
           </a:prstGeom>
           <a:solidFill>
-            <a:srgbClr val="F9F0F2"/>
+            <a:srgbClr val="FBECEF"/>
           </a:solidFill>
-          <a:ln w="12700">
-            <a:solidFill>
-              <a:srgbClr val="F0D1D6"/>
-            </a:solidFill>
+          <a:ln>
+            <a:noFill/>
           </a:ln>
         </p:spPr>
         <p:txBody>
@@ -4059,20 +4289,49 @@
       </p:sp>
       <p:sp>
         <p:nvSpPr>
-          <p:cNvPr id="18" name="번호 4"/>
+          <p:cNvPr id="23" name="포인트 막대"/>
           <p:cNvSpPr/>
           <p:nvPr/>
         </p:nvSpPr>
         <p:spPr>
           <a:xfrm>
-            <a:off x="822959" y="4937759"/>
+            <a:off x="640080" y="5047488"/>
+            <a:ext cx="54864" cy="694944"/>
+          </a:xfrm>
+          <a:prstGeom prst="rect">
+            <a:avLst/>
+          </a:prstGeom>
+          <a:solidFill>
+            <a:srgbClr val="E198A4"/>
+          </a:solidFill>
+          <a:ln>
+            <a:noFill/>
+          </a:ln>
+        </p:spPr>
+        <p:txBody>
+          <a:bodyPr rtlCol="0" anchor="ctr"/>
+          <a:lstStyle/>
+          <a:p>
+            <a:pPr algn="ctr"/>
+          </a:p>
+        </p:txBody>
+      </p:sp>
+      <p:sp>
+        <p:nvSpPr>
+          <p:cNvPr id="24" name="번호 4"/>
+          <p:cNvSpPr/>
+          <p:nvPr/>
+        </p:nvSpPr>
+        <p:spPr>
+          <a:xfrm>
+            <a:off x="822959" y="5166359"/>
             <a:ext cx="457200" cy="457200"/>
           </a:xfrm>
           <a:prstGeom prst="ellipse">
             <a:avLst/>
           </a:prstGeom>
           <a:solidFill>
-            <a:srgbClr val="8D3443"/>
+            <a:srgbClr val="EAC7B8"/>
           </a:solidFill>
           <a:ln>
             <a:noFill/>
@@ -4092,7 +4351,7 @@
             <a:r>
               <a:rPr sz="1600" b="1" i="0">
                 <a:solidFill>
-                  <a:srgbClr val="FFFFFF"/>
+                  <a:srgbClr val="26231F"/>
                 </a:solidFill>
               </a:rPr>
               <a:t>4</a:t>
@@ -4102,13 +4361,13 @@
       </p:sp>
       <p:sp>
         <p:nvSpPr>
-          <p:cNvPr id="19" name="TextBox 18"/>
+          <p:cNvPr id="25" name="TextBox 24"/>
           <p:cNvSpPr txBox="1"/>
           <p:nvPr/>
         </p:nvSpPr>
         <p:spPr>
           <a:xfrm>
-            <a:off x="1508760" y="4754879"/>
+            <a:off x="1508760" y="4983479"/>
             <a:ext cx="2743200" cy="822960"/>
           </a:xfrm>
           <a:prstGeom prst="rect">
@@ -4130,7 +4389,7 @@
             <a:r>
               <a:rPr sz="1800" b="1" i="0">
                 <a:solidFill>
-                  <a:srgbClr val="431920"/>
+                  <a:srgbClr val="49272D"/>
                 </a:solidFill>
               </a:rPr>
               <a:t>향후 계획</a:t>
@@ -4140,13 +4399,13 @@
       </p:sp>
       <p:sp>
         <p:nvSpPr>
-          <p:cNvPr id="20" name="TextBox 19"/>
+          <p:cNvPr id="26" name="TextBox 25"/>
           <p:cNvSpPr txBox="1"/>
           <p:nvPr/>
         </p:nvSpPr>
         <p:spPr>
           <a:xfrm>
-            <a:off x="4297680" y="4754879"/>
+            <a:off x="4297680" y="4983479"/>
             <a:ext cx="7071055" cy="822960"/>
           </a:xfrm>
           <a:prstGeom prst="rect">
@@ -4168,7 +4427,7 @@
             <a:r>
               <a:rPr sz="1500" b="0" i="0">
                 <a:solidFill>
-                  <a:srgbClr val="2B2B2B"/>
+                  <a:srgbClr val="26231F"/>
                 </a:solidFill>
               </a:rPr>
               <a:t>한 줄로 내용을 적어 주세요</a:t>
@@ -4210,43 +4469,110 @@
         </p:nvSpPr>
         <p:spPr>
           <a:xfrm>
-            <a:off x="-182880" y="6144768"/>
-            <a:ext cx="12557455" cy="731520"/>
+            <a:off x="0" y="6565392"/>
+            <a:ext cx="12191695" cy="292608"/>
+          </a:xfrm>
+          <a:prstGeom prst="rect">
+            <a:avLst/>
+          </a:prstGeom>
+          <a:solidFill>
+            <a:srgbClr val="EBADB8"/>
+          </a:solidFill>
+          <a:ln>
+            <a:noFill/>
+          </a:ln>
+        </p:spPr>
+        <p:txBody>
+          <a:bodyPr rtlCol="0" anchor="ctr"/>
+          <a:lstStyle/>
+          <a:p>
+            <a:pPr algn="ctr"/>
+          </a:p>
+        </p:txBody>
+      </p:sp>
+      <p:sp>
+        <p:nvSpPr>
+          <p:cNvPr id="4" name="장식"/>
+          <p:cNvSpPr/>
+          <p:nvPr/>
+        </p:nvSpPr>
+        <p:spPr>
+          <a:xfrm>
+            <a:off x="10180015" y="-1645920"/>
+            <a:ext cx="3474720" cy="3474720"/>
+          </a:xfrm>
+          <a:prstGeom prst="ellipse">
+            <a:avLst/>
+          </a:prstGeom>
+          <a:solidFill>
+            <a:srgbClr val="EBADB8"/>
+          </a:solidFill>
+          <a:ln>
+            <a:noFill/>
+          </a:ln>
+        </p:spPr>
+        <p:txBody>
+          <a:bodyPr rtlCol="0" anchor="ctr"/>
+          <a:lstStyle/>
+          <a:p>
+            <a:pPr algn="ctr"/>
+          </a:p>
+        </p:txBody>
+      </p:sp>
+      <p:sp>
+        <p:nvSpPr>
+          <p:cNvPr id="5" name="상단 라벨"/>
+          <p:cNvSpPr txBox="1"/>
+          <p:nvPr/>
+        </p:nvSpPr>
+        <p:spPr>
+          <a:xfrm>
+            <a:off x="640080" y="274320"/>
+            <a:ext cx="5486400" cy="274320"/>
+          </a:xfrm>
+          <a:prstGeom prst="rect">
+            <a:avLst/>
+          </a:prstGeom>
+          <a:noFill/>
+        </p:spPr>
+        <p:txBody>
+          <a:bodyPr wrap="square" lIns="54864" rIns="54864" tIns="27432" bIns="27432" anchor="ctr">
+            <a:noAutofit/>
+          </a:bodyPr>
+          <a:lstStyle/>
+          <a:p>
+            <a:pPr algn="l">
+              <a:lnSpc>
+                <a:spcPct val="115000"/>
+              </a:lnSpc>
+            </a:pPr>
+            <a:r>
+              <a:rPr sz="900" b="1" i="0" spc="250">
+                <a:solidFill>
+                  <a:srgbClr val="26231F"/>
+                </a:solidFill>
+              </a:rPr>
+              <a:t>PRESENTATION</a:t>
+            </a:r>
+          </a:p>
+        </p:txBody>
+      </p:sp>
+      <p:sp>
+        <p:nvSpPr>
+          <p:cNvPr id="6" name="포인트"/>
+          <p:cNvSpPr/>
+          <p:nvPr/>
+        </p:nvSpPr>
+        <p:spPr>
+          <a:xfrm>
+            <a:off x="11048695" y="502919"/>
+            <a:ext cx="274320" cy="109728"/>
           </a:xfrm>
           <a:prstGeom prst="wave">
             <a:avLst/>
           </a:prstGeom>
           <a:solidFill>
-            <a:srgbClr val="F0D1D6"/>
-          </a:solidFill>
-          <a:ln>
-            <a:noFill/>
-          </a:ln>
-        </p:spPr>
-        <p:txBody>
-          <a:bodyPr rtlCol="0" anchor="ctr"/>
-          <a:lstStyle/>
-          <a:p>
-            <a:pPr algn="ctr"/>
-          </a:p>
-        </p:txBody>
-      </p:sp>
-      <p:sp>
-        <p:nvSpPr>
-          <p:cNvPr id="4" name="장식"/>
-          <p:cNvSpPr/>
-          <p:nvPr/>
-        </p:nvSpPr>
-        <p:spPr>
-          <a:xfrm>
-            <a:off x="-182880" y="6400800"/>
-            <a:ext cx="12557455" cy="502920"/>
-          </a:xfrm>
-          <a:prstGeom prst="wave">
-            <a:avLst/>
-          </a:prstGeom>
-          <a:solidFill>
-            <a:srgbClr val="8D3443"/>
+            <a:srgbClr val="FFFFFF"/>
           </a:solidFill>
           <a:ln>
             <a:noFill/>
@@ -4272,8 +4598,8 @@
         </p:nvSpPr>
         <p:spPr>
           <a:xfrm>
-            <a:off x="640080" y="457200"/>
-            <a:ext cx="9722815" cy="868680"/>
+            <a:off x="640080" y="658368"/>
+            <a:ext cx="9082735" cy="868680"/>
           </a:xfrm>
         </p:spPr>
         <p:txBody>
@@ -4290,7 +4616,7 @@
             <a:r>
               <a:rPr sz="3000" b="1" i="0">
                 <a:solidFill>
-                  <a:srgbClr val="431920"/>
+                  <a:srgbClr val="26231F"/>
                 </a:solidFill>
               </a:rPr>
               <a:t>핵심 메시지</a:t>
@@ -4300,13 +4626,13 @@
       </p:sp>
       <p:sp>
         <p:nvSpPr>
-          <p:cNvPr id="5" name="핵심 문장"/>
+          <p:cNvPr id="7" name="핵심 문장"/>
           <p:cNvSpPr txBox="1"/>
           <p:nvPr/>
         </p:nvSpPr>
         <p:spPr>
           <a:xfrm>
-            <a:off x="640080" y="1554480"/>
+            <a:off x="640080" y="1783080"/>
             <a:ext cx="10911535" cy="1188720"/>
           </a:xfrm>
           <a:prstGeom prst="rect">
@@ -4328,7 +4654,7 @@
             <a:r>
               <a:rPr sz="2600" b="1" i="0">
                 <a:solidFill>
-                  <a:srgbClr val="431920"/>
+                  <a:srgbClr val="49272D"/>
                 </a:solidFill>
               </a:rPr>
               <a:t>한 문장으로 말하면 — 여기에 핵심 메시지를 입력하세요</a:t>
@@ -4338,27 +4664,25 @@
       </p:sp>
       <p:sp>
         <p:nvSpPr>
-          <p:cNvPr id="6" name="카드 1"/>
+          <p:cNvPr id="8" name="카드 1"/>
           <p:cNvSpPr/>
           <p:nvPr/>
         </p:nvSpPr>
         <p:spPr>
           <a:xfrm>
-            <a:off x="640080" y="3017520"/>
+            <a:off x="640080" y="3246120"/>
             <a:ext cx="3484778" cy="3017520"/>
           </a:xfrm>
           <a:prstGeom prst="roundRect">
             <a:avLst>
-              <a:gd name="adj" fmla="val 8000"/>
+              <a:gd name="adj" fmla="val 4000"/>
             </a:avLst>
           </a:prstGeom>
           <a:solidFill>
-            <a:srgbClr val="F9F0F2"/>
+            <a:srgbClr val="FBECEF"/>
           </a:solidFill>
-          <a:ln w="15875">
-            <a:solidFill>
-              <a:srgbClr val="F0D1D6"/>
-            </a:solidFill>
+          <a:ln>
+            <a:noFill/>
           </a:ln>
         </p:spPr>
         <p:txBody>
@@ -4371,20 +4695,49 @@
       </p:sp>
       <p:sp>
         <p:nvSpPr>
-          <p:cNvPr id="7" name="번호 1"/>
+          <p:cNvPr id="9" name="포인트 막대"/>
           <p:cNvSpPr/>
           <p:nvPr/>
         </p:nvSpPr>
         <p:spPr>
           <a:xfrm>
-            <a:off x="822959" y="3200400"/>
+            <a:off x="640080" y="3355848"/>
+            <a:ext cx="54864" cy="2798063"/>
+          </a:xfrm>
+          <a:prstGeom prst="rect">
+            <a:avLst/>
+          </a:prstGeom>
+          <a:solidFill>
+            <a:srgbClr val="E198A4"/>
+          </a:solidFill>
+          <a:ln>
+            <a:noFill/>
+          </a:ln>
+        </p:spPr>
+        <p:txBody>
+          <a:bodyPr rtlCol="0" anchor="ctr"/>
+          <a:lstStyle/>
+          <a:p>
+            <a:pPr algn="ctr"/>
+          </a:p>
+        </p:txBody>
+      </p:sp>
+      <p:sp>
+        <p:nvSpPr>
+          <p:cNvPr id="10" name="번호 1"/>
+          <p:cNvSpPr/>
+          <p:nvPr/>
+        </p:nvSpPr>
+        <p:spPr>
+          <a:xfrm>
+            <a:off x="822959" y="3429000"/>
             <a:ext cx="457200" cy="457200"/>
           </a:xfrm>
           <a:prstGeom prst="ellipse">
             <a:avLst/>
           </a:prstGeom>
           <a:solidFill>
-            <a:srgbClr val="8D3443"/>
+            <a:srgbClr val="EAC7B8"/>
           </a:solidFill>
           <a:ln>
             <a:noFill/>
@@ -4404,7 +4757,7 @@
             <a:r>
               <a:rPr sz="1600" b="1" i="0">
                 <a:solidFill>
-                  <a:srgbClr val="FFFFFF"/>
+                  <a:srgbClr val="26231F"/>
                 </a:solidFill>
               </a:rPr>
               <a:t>1</a:t>
@@ -4414,13 +4767,13 @@
       </p:sp>
       <p:sp>
         <p:nvSpPr>
-          <p:cNvPr id="8" name="TextBox 7"/>
+          <p:cNvPr id="11" name="TextBox 10"/>
           <p:cNvSpPr txBox="1"/>
           <p:nvPr/>
         </p:nvSpPr>
         <p:spPr>
           <a:xfrm>
-            <a:off x="777240" y="3794760"/>
+            <a:off x="777240" y="4023360"/>
             <a:ext cx="3210458" cy="640080"/>
           </a:xfrm>
           <a:prstGeom prst="rect">
@@ -4442,7 +4795,7 @@
             <a:r>
               <a:rPr sz="1800" b="1" i="0">
                 <a:solidFill>
-                  <a:srgbClr val="431920"/>
+                  <a:srgbClr val="49272D"/>
                 </a:solidFill>
               </a:rPr>
               <a:t>진행</a:t>
@@ -4452,13 +4805,13 @@
       </p:sp>
       <p:sp>
         <p:nvSpPr>
-          <p:cNvPr id="9" name="TextBox 8"/>
+          <p:cNvPr id="12" name="TextBox 11"/>
           <p:cNvSpPr txBox="1"/>
           <p:nvPr/>
         </p:nvSpPr>
         <p:spPr>
           <a:xfrm>
-            <a:off x="777240" y="4480560"/>
+            <a:off x="777240" y="4709160"/>
             <a:ext cx="3210458" cy="1417319"/>
           </a:xfrm>
           <a:prstGeom prst="rect">
@@ -4480,7 +4833,7 @@
             <a:r>
               <a:rPr sz="1600" b="0" i="0">
                 <a:solidFill>
-                  <a:srgbClr val="2B2B2B"/>
+                  <a:srgbClr val="26231F"/>
                 </a:solidFill>
               </a:rPr>
               <a:t>내용을 입력하세요</a:t>
@@ -4495,7 +4848,7 @@
             <a:r>
               <a:rPr sz="1600" b="0" i="0">
                 <a:solidFill>
-                  <a:srgbClr val="2B2B2B"/>
+                  <a:srgbClr val="26231F"/>
                 </a:solidFill>
               </a:rPr>
               <a:t>내용을 입력하세요</a:t>
@@ -4505,27 +4858,25 @@
       </p:sp>
       <p:sp>
         <p:nvSpPr>
-          <p:cNvPr id="10" name="카드 2"/>
+          <p:cNvPr id="13" name="카드 2"/>
           <p:cNvSpPr/>
           <p:nvPr/>
         </p:nvSpPr>
         <p:spPr>
           <a:xfrm>
-            <a:off x="4353458" y="3017520"/>
+            <a:off x="4353458" y="3246120"/>
             <a:ext cx="3484778" cy="3017520"/>
           </a:xfrm>
           <a:prstGeom prst="roundRect">
             <a:avLst>
-              <a:gd name="adj" fmla="val 8000"/>
+              <a:gd name="adj" fmla="val 4000"/>
             </a:avLst>
           </a:prstGeom>
           <a:solidFill>
-            <a:srgbClr val="F9F0F2"/>
+            <a:srgbClr val="FBECEF"/>
           </a:solidFill>
-          <a:ln w="15875">
-            <a:solidFill>
-              <a:srgbClr val="F0D1D6"/>
-            </a:solidFill>
+          <a:ln>
+            <a:noFill/>
           </a:ln>
         </p:spPr>
         <p:txBody>
@@ -4538,20 +4889,49 @@
       </p:sp>
       <p:sp>
         <p:nvSpPr>
-          <p:cNvPr id="11" name="번호 2"/>
+          <p:cNvPr id="14" name="포인트 막대"/>
           <p:cNvSpPr/>
           <p:nvPr/>
         </p:nvSpPr>
         <p:spPr>
           <a:xfrm>
-            <a:off x="4536338" y="3200400"/>
+            <a:off x="4353458" y="3355848"/>
+            <a:ext cx="54864" cy="2798063"/>
+          </a:xfrm>
+          <a:prstGeom prst="rect">
+            <a:avLst/>
+          </a:prstGeom>
+          <a:solidFill>
+            <a:srgbClr val="E198A4"/>
+          </a:solidFill>
+          <a:ln>
+            <a:noFill/>
+          </a:ln>
+        </p:spPr>
+        <p:txBody>
+          <a:bodyPr rtlCol="0" anchor="ctr"/>
+          <a:lstStyle/>
+          <a:p>
+            <a:pPr algn="ctr"/>
+          </a:p>
+        </p:txBody>
+      </p:sp>
+      <p:sp>
+        <p:nvSpPr>
+          <p:cNvPr id="15" name="번호 2"/>
+          <p:cNvSpPr/>
+          <p:nvPr/>
+        </p:nvSpPr>
+        <p:spPr>
+          <a:xfrm>
+            <a:off x="4536338" y="3429000"/>
             <a:ext cx="457200" cy="457200"/>
           </a:xfrm>
           <a:prstGeom prst="ellipse">
             <a:avLst/>
           </a:prstGeom>
           <a:solidFill>
-            <a:srgbClr val="8D3443"/>
+            <a:srgbClr val="EAC7B8"/>
           </a:solidFill>
           <a:ln>
             <a:noFill/>
@@ -4571,7 +4951,7 @@
             <a:r>
               <a:rPr sz="1600" b="1" i="0">
                 <a:solidFill>
-                  <a:srgbClr val="FFFFFF"/>
+                  <a:srgbClr val="26231F"/>
                 </a:solidFill>
               </a:rPr>
               <a:t>2</a:t>
@@ -4581,13 +4961,13 @@
       </p:sp>
       <p:sp>
         <p:nvSpPr>
-          <p:cNvPr id="12" name="TextBox 11"/>
+          <p:cNvPr id="16" name="TextBox 15"/>
           <p:cNvSpPr txBox="1"/>
           <p:nvPr/>
         </p:nvSpPr>
         <p:spPr>
           <a:xfrm>
-            <a:off x="4490618" y="3794760"/>
+            <a:off x="4490618" y="4023360"/>
             <a:ext cx="3210458" cy="640080"/>
           </a:xfrm>
           <a:prstGeom prst="rect">
@@ -4609,7 +4989,7 @@
             <a:r>
               <a:rPr sz="1800" b="1" i="0">
                 <a:solidFill>
-                  <a:srgbClr val="431920"/>
+                  <a:srgbClr val="49272D"/>
                 </a:solidFill>
               </a:rPr>
               <a:t>성과</a:t>
@@ -4619,13 +4999,13 @@
       </p:sp>
       <p:sp>
         <p:nvSpPr>
-          <p:cNvPr id="13" name="TextBox 12"/>
+          <p:cNvPr id="17" name="TextBox 16"/>
           <p:cNvSpPr txBox="1"/>
           <p:nvPr/>
         </p:nvSpPr>
         <p:spPr>
           <a:xfrm>
-            <a:off x="4490618" y="4480560"/>
+            <a:off x="4490618" y="4709160"/>
             <a:ext cx="3210458" cy="1417319"/>
           </a:xfrm>
           <a:prstGeom prst="rect">
@@ -4647,7 +5027,7 @@
             <a:r>
               <a:rPr sz="1600" b="0" i="0">
                 <a:solidFill>
-                  <a:srgbClr val="2B2B2B"/>
+                  <a:srgbClr val="26231F"/>
                 </a:solidFill>
               </a:rPr>
               <a:t>내용을 입력하세요</a:t>
@@ -4662,7 +5042,7 @@
             <a:r>
               <a:rPr sz="1600" b="0" i="0">
                 <a:solidFill>
-                  <a:srgbClr val="2B2B2B"/>
+                  <a:srgbClr val="26231F"/>
                 </a:solidFill>
               </a:rPr>
               <a:t>내용을 입력하세요</a:t>
@@ -4672,27 +5052,25 @@
       </p:sp>
       <p:sp>
         <p:nvSpPr>
-          <p:cNvPr id="14" name="카드 3"/>
+          <p:cNvPr id="18" name="카드 3"/>
           <p:cNvSpPr/>
           <p:nvPr/>
         </p:nvSpPr>
         <p:spPr>
           <a:xfrm>
-            <a:off x="8066836" y="3017520"/>
+            <a:off x="8066836" y="3246120"/>
             <a:ext cx="3484778" cy="3017520"/>
           </a:xfrm>
           <a:prstGeom prst="roundRect">
             <a:avLst>
-              <a:gd name="adj" fmla="val 8000"/>
+              <a:gd name="adj" fmla="val 4000"/>
             </a:avLst>
           </a:prstGeom>
           <a:solidFill>
-            <a:srgbClr val="F9F0F2"/>
+            <a:srgbClr val="FBECEF"/>
           </a:solidFill>
-          <a:ln w="15875">
-            <a:solidFill>
-              <a:srgbClr val="F0D1D6"/>
-            </a:solidFill>
+          <a:ln>
+            <a:noFill/>
           </a:ln>
         </p:spPr>
         <p:txBody>
@@ -4705,20 +5083,49 @@
       </p:sp>
       <p:sp>
         <p:nvSpPr>
-          <p:cNvPr id="15" name="번호 3"/>
+          <p:cNvPr id="19" name="포인트 막대"/>
           <p:cNvSpPr/>
           <p:nvPr/>
         </p:nvSpPr>
         <p:spPr>
           <a:xfrm>
-            <a:off x="8249716" y="3200400"/>
+            <a:off x="8066836" y="3355848"/>
+            <a:ext cx="54864" cy="2798063"/>
+          </a:xfrm>
+          <a:prstGeom prst="rect">
+            <a:avLst/>
+          </a:prstGeom>
+          <a:solidFill>
+            <a:srgbClr val="E198A4"/>
+          </a:solidFill>
+          <a:ln>
+            <a:noFill/>
+          </a:ln>
+        </p:spPr>
+        <p:txBody>
+          <a:bodyPr rtlCol="0" anchor="ctr"/>
+          <a:lstStyle/>
+          <a:p>
+            <a:pPr algn="ctr"/>
+          </a:p>
+        </p:txBody>
+      </p:sp>
+      <p:sp>
+        <p:nvSpPr>
+          <p:cNvPr id="20" name="번호 3"/>
+          <p:cNvSpPr/>
+          <p:nvPr/>
+        </p:nvSpPr>
+        <p:spPr>
+          <a:xfrm>
+            <a:off x="8249716" y="3429000"/>
             <a:ext cx="457200" cy="457200"/>
           </a:xfrm>
           <a:prstGeom prst="ellipse">
             <a:avLst/>
           </a:prstGeom>
           <a:solidFill>
-            <a:srgbClr val="8D3443"/>
+            <a:srgbClr val="EAC7B8"/>
           </a:solidFill>
           <a:ln>
             <a:noFill/>
@@ -4738,7 +5145,7 @@
             <a:r>
               <a:rPr sz="1600" b="1" i="0">
                 <a:solidFill>
-                  <a:srgbClr val="FFFFFF"/>
+                  <a:srgbClr val="26231F"/>
                 </a:solidFill>
               </a:rPr>
               <a:t>3</a:t>
@@ -4748,13 +5155,13 @@
       </p:sp>
       <p:sp>
         <p:nvSpPr>
-          <p:cNvPr id="16" name="TextBox 15"/>
+          <p:cNvPr id="21" name="TextBox 20"/>
           <p:cNvSpPr txBox="1"/>
           <p:nvPr/>
         </p:nvSpPr>
         <p:spPr>
           <a:xfrm>
-            <a:off x="8203996" y="3794760"/>
+            <a:off x="8203996" y="4023360"/>
             <a:ext cx="3210458" cy="640080"/>
           </a:xfrm>
           <a:prstGeom prst="rect">
@@ -4776,7 +5183,7 @@
             <a:r>
               <a:rPr sz="1800" b="1" i="0">
                 <a:solidFill>
-                  <a:srgbClr val="431920"/>
+                  <a:srgbClr val="49272D"/>
                 </a:solidFill>
               </a:rPr>
               <a:t>이슈</a:t>
@@ -4786,13 +5193,13 @@
       </p:sp>
       <p:sp>
         <p:nvSpPr>
-          <p:cNvPr id="17" name="TextBox 16"/>
+          <p:cNvPr id="22" name="TextBox 21"/>
           <p:cNvSpPr txBox="1"/>
           <p:nvPr/>
         </p:nvSpPr>
         <p:spPr>
           <a:xfrm>
-            <a:off x="8203996" y="4480560"/>
+            <a:off x="8203996" y="4709160"/>
             <a:ext cx="3210458" cy="1417319"/>
           </a:xfrm>
           <a:prstGeom prst="rect">
@@ -4814,7 +5221,7 @@
             <a:r>
               <a:rPr sz="1600" b="0" i="0">
                 <a:solidFill>
-                  <a:srgbClr val="2B2B2B"/>
+                  <a:srgbClr val="26231F"/>
                 </a:solidFill>
               </a:rPr>
               <a:t>내용을 입력하세요</a:t>
@@ -4829,7 +5236,7 @@
             <a:r>
               <a:rPr sz="1600" b="0" i="0">
                 <a:solidFill>
-                  <a:srgbClr val="2B2B2B"/>
+                  <a:srgbClr val="26231F"/>
                 </a:solidFill>
               </a:rPr>
               <a:t>내용을 입력하세요</a:t>
@@ -4871,43 +5278,110 @@
         </p:nvSpPr>
         <p:spPr>
           <a:xfrm>
-            <a:off x="-182880" y="6144768"/>
-            <a:ext cx="12557455" cy="731520"/>
+            <a:off x="0" y="6565392"/>
+            <a:ext cx="12191695" cy="292608"/>
+          </a:xfrm>
+          <a:prstGeom prst="rect">
+            <a:avLst/>
+          </a:prstGeom>
+          <a:solidFill>
+            <a:srgbClr val="EBADB8"/>
+          </a:solidFill>
+          <a:ln>
+            <a:noFill/>
+          </a:ln>
+        </p:spPr>
+        <p:txBody>
+          <a:bodyPr rtlCol="0" anchor="ctr"/>
+          <a:lstStyle/>
+          <a:p>
+            <a:pPr algn="ctr"/>
+          </a:p>
+        </p:txBody>
+      </p:sp>
+      <p:sp>
+        <p:nvSpPr>
+          <p:cNvPr id="4" name="장식"/>
+          <p:cNvSpPr/>
+          <p:nvPr/>
+        </p:nvSpPr>
+        <p:spPr>
+          <a:xfrm>
+            <a:off x="10180015" y="-1645920"/>
+            <a:ext cx="3474720" cy="3474720"/>
+          </a:xfrm>
+          <a:prstGeom prst="ellipse">
+            <a:avLst/>
+          </a:prstGeom>
+          <a:solidFill>
+            <a:srgbClr val="EBADB8"/>
+          </a:solidFill>
+          <a:ln>
+            <a:noFill/>
+          </a:ln>
+        </p:spPr>
+        <p:txBody>
+          <a:bodyPr rtlCol="0" anchor="ctr"/>
+          <a:lstStyle/>
+          <a:p>
+            <a:pPr algn="ctr"/>
+          </a:p>
+        </p:txBody>
+      </p:sp>
+      <p:sp>
+        <p:nvSpPr>
+          <p:cNvPr id="5" name="상단 라벨"/>
+          <p:cNvSpPr txBox="1"/>
+          <p:nvPr/>
+        </p:nvSpPr>
+        <p:spPr>
+          <a:xfrm>
+            <a:off x="640080" y="274320"/>
+            <a:ext cx="5486400" cy="274320"/>
+          </a:xfrm>
+          <a:prstGeom prst="rect">
+            <a:avLst/>
+          </a:prstGeom>
+          <a:noFill/>
+        </p:spPr>
+        <p:txBody>
+          <a:bodyPr wrap="square" lIns="54864" rIns="54864" tIns="27432" bIns="27432" anchor="ctr">
+            <a:noAutofit/>
+          </a:bodyPr>
+          <a:lstStyle/>
+          <a:p>
+            <a:pPr algn="l">
+              <a:lnSpc>
+                <a:spcPct val="115000"/>
+              </a:lnSpc>
+            </a:pPr>
+            <a:r>
+              <a:rPr sz="900" b="1" i="0" spc="250">
+                <a:solidFill>
+                  <a:srgbClr val="26231F"/>
+                </a:solidFill>
+              </a:rPr>
+              <a:t>PRESENTATION</a:t>
+            </a:r>
+          </a:p>
+        </p:txBody>
+      </p:sp>
+      <p:sp>
+        <p:nvSpPr>
+          <p:cNvPr id="6" name="포인트"/>
+          <p:cNvSpPr/>
+          <p:nvPr/>
+        </p:nvSpPr>
+        <p:spPr>
+          <a:xfrm>
+            <a:off x="11048695" y="502919"/>
+            <a:ext cx="274320" cy="109728"/>
           </a:xfrm>
           <a:prstGeom prst="wave">
             <a:avLst/>
           </a:prstGeom>
           <a:solidFill>
-            <a:srgbClr val="F0D1D6"/>
-          </a:solidFill>
-          <a:ln>
-            <a:noFill/>
-          </a:ln>
-        </p:spPr>
-        <p:txBody>
-          <a:bodyPr rtlCol="0" anchor="ctr"/>
-          <a:lstStyle/>
-          <a:p>
-            <a:pPr algn="ctr"/>
-          </a:p>
-        </p:txBody>
-      </p:sp>
-      <p:sp>
-        <p:nvSpPr>
-          <p:cNvPr id="4" name="장식"/>
-          <p:cNvSpPr/>
-          <p:nvPr/>
-        </p:nvSpPr>
-        <p:spPr>
-          <a:xfrm>
-            <a:off x="-182880" y="6400800"/>
-            <a:ext cx="12557455" cy="502920"/>
-          </a:xfrm>
-          <a:prstGeom prst="wave">
-            <a:avLst/>
-          </a:prstGeom>
-          <a:solidFill>
-            <a:srgbClr val="8D3443"/>
+            <a:srgbClr val="FFFFFF"/>
           </a:solidFill>
           <a:ln>
             <a:noFill/>
@@ -4933,8 +5407,8 @@
         </p:nvSpPr>
         <p:spPr>
           <a:xfrm>
-            <a:off x="640080" y="457200"/>
-            <a:ext cx="9722815" cy="868680"/>
+            <a:off x="640080" y="658368"/>
+            <a:ext cx="9082735" cy="868680"/>
           </a:xfrm>
         </p:spPr>
         <p:txBody>
@@ -4951,7 +5425,7 @@
             <a:r>
               <a:rPr sz="3000" b="1" i="0">
                 <a:solidFill>
-                  <a:srgbClr val="431920"/>
+                  <a:srgbClr val="26231F"/>
                 </a:solidFill>
               </a:rPr>
               <a:t>한눈에 비교</a:t>
@@ -4961,27 +5435,25 @@
       </p:sp>
       <p:sp>
         <p:nvSpPr>
-          <p:cNvPr id="5" name="왼쪽 칸"/>
+          <p:cNvPr id="7" name="왼쪽 칸"/>
           <p:cNvSpPr/>
           <p:nvPr/>
         </p:nvSpPr>
         <p:spPr>
           <a:xfrm>
-            <a:off x="640080" y="1554480"/>
-            <a:ext cx="5272887" cy="4389120"/>
+            <a:off x="640080" y="1783080"/>
+            <a:ext cx="5272887" cy="3291840"/>
           </a:xfrm>
           <a:prstGeom prst="roundRect">
             <a:avLst>
-              <a:gd name="adj" fmla="val 8000"/>
+              <a:gd name="adj" fmla="val 4000"/>
             </a:avLst>
           </a:prstGeom>
           <a:solidFill>
-            <a:srgbClr val="F9F0F2"/>
+            <a:srgbClr val="FBECEF"/>
           </a:solidFill>
-          <a:ln w="12700">
-            <a:solidFill>
-              <a:srgbClr val="F0D1D6"/>
-            </a:solidFill>
+          <a:ln>
+            <a:noFill/>
           </a:ln>
         </p:spPr>
         <p:txBody>
@@ -4994,13 +5466,42 @@
       </p:sp>
       <p:sp>
         <p:nvSpPr>
-          <p:cNvPr id="6" name="칸 제목 바"/>
+          <p:cNvPr id="8" name="포인트 막대"/>
           <p:cNvSpPr/>
           <p:nvPr/>
         </p:nvSpPr>
         <p:spPr>
           <a:xfrm>
-            <a:off x="640080" y="1554480"/>
+            <a:off x="640080" y="1892807"/>
+            <a:ext cx="54864" cy="3072384"/>
+          </a:xfrm>
+          <a:prstGeom prst="rect">
+            <a:avLst/>
+          </a:prstGeom>
+          <a:solidFill>
+            <a:srgbClr val="E198A4"/>
+          </a:solidFill>
+          <a:ln>
+            <a:noFill/>
+          </a:ln>
+        </p:spPr>
+        <p:txBody>
+          <a:bodyPr rtlCol="0" anchor="ctr"/>
+          <a:lstStyle/>
+          <a:p>
+            <a:pPr algn="ctr"/>
+          </a:p>
+        </p:txBody>
+      </p:sp>
+      <p:sp>
+        <p:nvSpPr>
+          <p:cNvPr id="9" name="칸 제목 바"/>
+          <p:cNvSpPr/>
+          <p:nvPr/>
+        </p:nvSpPr>
+        <p:spPr>
+          <a:xfrm>
+            <a:off x="640080" y="1783080"/>
             <a:ext cx="5272887" cy="640080"/>
           </a:xfrm>
           <a:prstGeom prst="roundRect">
@@ -5009,7 +5510,7 @@
             </a:avLst>
           </a:prstGeom>
           <a:solidFill>
-            <a:srgbClr val="8D3443"/>
+            <a:srgbClr val="E198A4"/>
           </a:solidFill>
           <a:ln>
             <a:noFill/>
@@ -5025,13 +5526,13 @@
       </p:sp>
       <p:sp>
         <p:nvSpPr>
-          <p:cNvPr id="7" name="TextBox 6"/>
+          <p:cNvPr id="10" name="TextBox 9"/>
           <p:cNvSpPr txBox="1"/>
           <p:nvPr/>
         </p:nvSpPr>
         <p:spPr>
           <a:xfrm>
-            <a:off x="822959" y="1554480"/>
+            <a:off x="822959" y="1783080"/>
             <a:ext cx="4907127" cy="640080"/>
           </a:xfrm>
           <a:prstGeom prst="rect">
@@ -5053,7 +5554,7 @@
             <a:r>
               <a:rPr sz="1800" b="1" i="0">
                 <a:solidFill>
-                  <a:srgbClr val="FFFFFF"/>
+                  <a:srgbClr val="26231F"/>
                 </a:solidFill>
               </a:rPr>
               <a:t>계획</a:t>
@@ -5063,14 +5564,14 @@
       </p:sp>
       <p:sp>
         <p:nvSpPr>
-          <p:cNvPr id="8" name="TextBox 7"/>
+          <p:cNvPr id="11" name="TextBox 10"/>
           <p:cNvSpPr txBox="1"/>
           <p:nvPr/>
         </p:nvSpPr>
         <p:spPr>
           <a:xfrm>
-            <a:off x="868680" y="2377440"/>
-            <a:ext cx="4815687" cy="3474720"/>
+            <a:off x="868680" y="2606040"/>
+            <a:ext cx="4815687" cy="2377440"/>
           </a:xfrm>
           <a:prstGeom prst="rect">
             <a:avLst/>
@@ -5096,7 +5597,7 @@
             <a:r>
               <a:rPr sz="1500" b="0" i="0">
                 <a:solidFill>
-                  <a:srgbClr val="2B2B2B"/>
+                  <a:srgbClr val="26231F"/>
                 </a:solidFill>
               </a:rPr>
               <a:t>내용을 입력하세요</a:t>
@@ -5116,7 +5617,7 @@
             <a:r>
               <a:rPr sz="1500" b="0" i="0">
                 <a:solidFill>
-                  <a:srgbClr val="2B2B2B"/>
+                  <a:srgbClr val="26231F"/>
                 </a:solidFill>
               </a:rPr>
               <a:t>내용을 입력하세요</a:t>
@@ -5136,7 +5637,7 @@
             <a:r>
               <a:rPr sz="1500" b="0" i="0">
                 <a:solidFill>
-                  <a:srgbClr val="2B2B2B"/>
+                  <a:srgbClr val="26231F"/>
                 </a:solidFill>
               </a:rPr>
               <a:t>내용을 입력하세요</a:t>
@@ -5146,27 +5647,25 @@
       </p:sp>
       <p:sp>
         <p:nvSpPr>
-          <p:cNvPr id="9" name="오른쪽 칸"/>
+          <p:cNvPr id="12" name="오른쪽 칸"/>
           <p:cNvSpPr/>
           <p:nvPr/>
         </p:nvSpPr>
         <p:spPr>
           <a:xfrm>
-            <a:off x="6278727" y="1554480"/>
-            <a:ext cx="5272887" cy="4389120"/>
+            <a:off x="6278727" y="1783080"/>
+            <a:ext cx="5272887" cy="3291840"/>
           </a:xfrm>
           <a:prstGeom prst="roundRect">
             <a:avLst>
-              <a:gd name="adj" fmla="val 8000"/>
+              <a:gd name="adj" fmla="val 4000"/>
             </a:avLst>
           </a:prstGeom>
           <a:solidFill>
-            <a:srgbClr val="F0D1D6"/>
+            <a:srgbClr val="F6D5DA"/>
           </a:solidFill>
-          <a:ln w="12700">
-            <a:solidFill>
-              <a:srgbClr val="F0D1D6"/>
-            </a:solidFill>
+          <a:ln>
+            <a:noFill/>
           </a:ln>
         </p:spPr>
         <p:txBody>
@@ -5179,13 +5678,42 @@
       </p:sp>
       <p:sp>
         <p:nvSpPr>
-          <p:cNvPr id="10" name="칸 제목 바"/>
+          <p:cNvPr id="13" name="포인트 막대"/>
           <p:cNvSpPr/>
           <p:nvPr/>
         </p:nvSpPr>
         <p:spPr>
           <a:xfrm>
-            <a:off x="6278727" y="1554480"/>
+            <a:off x="6278727" y="1892807"/>
+            <a:ext cx="54864" cy="3072384"/>
+          </a:xfrm>
+          <a:prstGeom prst="rect">
+            <a:avLst/>
+          </a:prstGeom>
+          <a:solidFill>
+            <a:srgbClr val="E198A4"/>
+          </a:solidFill>
+          <a:ln>
+            <a:noFill/>
+          </a:ln>
+        </p:spPr>
+        <p:txBody>
+          <a:bodyPr rtlCol="0" anchor="ctr"/>
+          <a:lstStyle/>
+          <a:p>
+            <a:pPr algn="ctr"/>
+          </a:p>
+        </p:txBody>
+      </p:sp>
+      <p:sp>
+        <p:nvSpPr>
+          <p:cNvPr id="14" name="칸 제목 바"/>
+          <p:cNvSpPr/>
+          <p:nvPr/>
+        </p:nvSpPr>
+        <p:spPr>
+          <a:xfrm>
+            <a:off x="6278727" y="1783080"/>
             <a:ext cx="5272887" cy="640080"/>
           </a:xfrm>
           <a:prstGeom prst="roundRect">
@@ -5194,7 +5722,7 @@
             </a:avLst>
           </a:prstGeom>
           <a:solidFill>
-            <a:srgbClr val="431920"/>
+            <a:srgbClr val="49272D"/>
           </a:solidFill>
           <a:ln>
             <a:noFill/>
@@ -5210,13 +5738,13 @@
       </p:sp>
       <p:sp>
         <p:nvSpPr>
-          <p:cNvPr id="11" name="TextBox 10"/>
+          <p:cNvPr id="15" name="TextBox 14"/>
           <p:cNvSpPr txBox="1"/>
           <p:nvPr/>
         </p:nvSpPr>
         <p:spPr>
           <a:xfrm>
-            <a:off x="6461607" y="1554480"/>
+            <a:off x="6461607" y="1783080"/>
             <a:ext cx="4907127" cy="640080"/>
           </a:xfrm>
           <a:prstGeom prst="rect">
@@ -5248,14 +5776,14 @@
       </p:sp>
       <p:sp>
         <p:nvSpPr>
-          <p:cNvPr id="12" name="TextBox 11"/>
+          <p:cNvPr id="16" name="TextBox 15"/>
           <p:cNvSpPr txBox="1"/>
           <p:nvPr/>
         </p:nvSpPr>
         <p:spPr>
           <a:xfrm>
-            <a:off x="6507327" y="2377440"/>
-            <a:ext cx="4815687" cy="3474720"/>
+            <a:off x="6507327" y="2606040"/>
+            <a:ext cx="4815687" cy="2377440"/>
           </a:xfrm>
           <a:prstGeom prst="rect">
             <a:avLst/>
@@ -5281,7 +5809,7 @@
             <a:r>
               <a:rPr sz="1500" b="0" i="0">
                 <a:solidFill>
-                  <a:srgbClr val="2B2B2B"/>
+                  <a:srgbClr val="26231F"/>
                 </a:solidFill>
               </a:rPr>
               <a:t>내용을 입력하세요</a:t>
@@ -5301,7 +5829,7 @@
             <a:r>
               <a:rPr sz="1500" b="0" i="0">
                 <a:solidFill>
-                  <a:srgbClr val="2B2B2B"/>
+                  <a:srgbClr val="26231F"/>
                 </a:solidFill>
               </a:rPr>
               <a:t>내용을 입력하세요</a:t>
@@ -5321,7 +5849,7 @@
             <a:r>
               <a:rPr sz="1500" b="0" i="0">
                 <a:solidFill>
-                  <a:srgbClr val="2B2B2B"/>
+                  <a:srgbClr val="26231F"/>
                 </a:solidFill>
               </a:rPr>
               <a:t>내용을 입력하세요</a:t>
@@ -5363,43 +5891,110 @@
         </p:nvSpPr>
         <p:spPr>
           <a:xfrm>
-            <a:off x="-182880" y="6144768"/>
-            <a:ext cx="12557455" cy="731520"/>
+            <a:off x="0" y="6565392"/>
+            <a:ext cx="12191695" cy="292608"/>
+          </a:xfrm>
+          <a:prstGeom prst="rect">
+            <a:avLst/>
+          </a:prstGeom>
+          <a:solidFill>
+            <a:srgbClr val="EBADB8"/>
+          </a:solidFill>
+          <a:ln>
+            <a:noFill/>
+          </a:ln>
+        </p:spPr>
+        <p:txBody>
+          <a:bodyPr rtlCol="0" anchor="ctr"/>
+          <a:lstStyle/>
+          <a:p>
+            <a:pPr algn="ctr"/>
+          </a:p>
+        </p:txBody>
+      </p:sp>
+      <p:sp>
+        <p:nvSpPr>
+          <p:cNvPr id="4" name="장식"/>
+          <p:cNvSpPr/>
+          <p:nvPr/>
+        </p:nvSpPr>
+        <p:spPr>
+          <a:xfrm>
+            <a:off x="10180015" y="-1645920"/>
+            <a:ext cx="3474720" cy="3474720"/>
+          </a:xfrm>
+          <a:prstGeom prst="ellipse">
+            <a:avLst/>
+          </a:prstGeom>
+          <a:solidFill>
+            <a:srgbClr val="EBADB8"/>
+          </a:solidFill>
+          <a:ln>
+            <a:noFill/>
+          </a:ln>
+        </p:spPr>
+        <p:txBody>
+          <a:bodyPr rtlCol="0" anchor="ctr"/>
+          <a:lstStyle/>
+          <a:p>
+            <a:pPr algn="ctr"/>
+          </a:p>
+        </p:txBody>
+      </p:sp>
+      <p:sp>
+        <p:nvSpPr>
+          <p:cNvPr id="5" name="상단 라벨"/>
+          <p:cNvSpPr txBox="1"/>
+          <p:nvPr/>
+        </p:nvSpPr>
+        <p:spPr>
+          <a:xfrm>
+            <a:off x="640080" y="274320"/>
+            <a:ext cx="5486400" cy="274320"/>
+          </a:xfrm>
+          <a:prstGeom prst="rect">
+            <a:avLst/>
+          </a:prstGeom>
+          <a:noFill/>
+        </p:spPr>
+        <p:txBody>
+          <a:bodyPr wrap="square" lIns="54864" rIns="54864" tIns="27432" bIns="27432" anchor="ctr">
+            <a:noAutofit/>
+          </a:bodyPr>
+          <a:lstStyle/>
+          <a:p>
+            <a:pPr algn="l">
+              <a:lnSpc>
+                <a:spcPct val="115000"/>
+              </a:lnSpc>
+            </a:pPr>
+            <a:r>
+              <a:rPr sz="900" b="1" i="0" spc="250">
+                <a:solidFill>
+                  <a:srgbClr val="26231F"/>
+                </a:solidFill>
+              </a:rPr>
+              <a:t>PRESENTATION</a:t>
+            </a:r>
+          </a:p>
+        </p:txBody>
+      </p:sp>
+      <p:sp>
+        <p:nvSpPr>
+          <p:cNvPr id="6" name="포인트"/>
+          <p:cNvSpPr/>
+          <p:nvPr/>
+        </p:nvSpPr>
+        <p:spPr>
+          <a:xfrm>
+            <a:off x="11048695" y="502919"/>
+            <a:ext cx="274320" cy="109728"/>
           </a:xfrm>
           <a:prstGeom prst="wave">
             <a:avLst/>
           </a:prstGeom>
           <a:solidFill>
-            <a:srgbClr val="F0D1D6"/>
-          </a:solidFill>
-          <a:ln>
-            <a:noFill/>
-          </a:ln>
-        </p:spPr>
-        <p:txBody>
-          <a:bodyPr rtlCol="0" anchor="ctr"/>
-          <a:lstStyle/>
-          <a:p>
-            <a:pPr algn="ctr"/>
-          </a:p>
-        </p:txBody>
-      </p:sp>
-      <p:sp>
-        <p:nvSpPr>
-          <p:cNvPr id="4" name="장식"/>
-          <p:cNvSpPr/>
-          <p:nvPr/>
-        </p:nvSpPr>
-        <p:spPr>
-          <a:xfrm>
-            <a:off x="-182880" y="6400800"/>
-            <a:ext cx="12557455" cy="502920"/>
-          </a:xfrm>
-          <a:prstGeom prst="wave">
-            <a:avLst/>
-          </a:prstGeom>
-          <a:solidFill>
-            <a:srgbClr val="8D3443"/>
+            <a:srgbClr val="FFFFFF"/>
           </a:solidFill>
           <a:ln>
             <a:noFill/>
@@ -5425,8 +6020,8 @@
         </p:nvSpPr>
         <p:spPr>
           <a:xfrm>
-            <a:off x="640080" y="457200"/>
-            <a:ext cx="9722815" cy="868680"/>
+            <a:off x="640080" y="658368"/>
+            <a:ext cx="9082735" cy="868680"/>
           </a:xfrm>
         </p:spPr>
         <p:txBody>
@@ -5443,7 +6038,7 @@
             <a:r>
               <a:rPr sz="3000" b="1" i="0">
                 <a:solidFill>
-                  <a:srgbClr val="431920"/>
+                  <a:srgbClr val="26231F"/>
                 </a:solidFill>
               </a:rPr>
               <a:t>일정·현황</a:t>
@@ -5453,14 +6048,14 @@
       </p:sp>
       <p:graphicFrame>
         <p:nvGraphicFramePr>
-          <p:cNvPr id="5" name="표"/>
+          <p:cNvPr id="7" name="표"/>
           <p:cNvGraphicFramePr>
             <a:graphicFrameLocks noGrp="1"/>
           </p:cNvGraphicFramePr>
           <p:nvPr/>
         </p:nvGraphicFramePr>
         <p:xfrm>
-          <a:off x="640080" y="1554480"/>
+          <a:off x="640080" y="1783080"/>
           <a:ext cx="10911532" cy="3840480"/>
         </p:xfrm>
         <a:graphic>
@@ -5485,7 +6080,7 @@
                       <a:r>
                         <a:rPr sz="1500" b="1">
                           <a:solidFill>
-                            <a:srgbClr val="FFFFFF"/>
+                            <a:srgbClr val="26231F"/>
                           </a:solidFill>
                         </a:rPr>
                         <a:t>항목</a:t>
@@ -5495,30 +6090,30 @@
                   <a:tcPr anchor="ctr" marL="73152" marR="73152">
                     <a:lnL w="9525" cap="flat" cmpd="sng" algn="ctr">
                       <a:solidFill>
-                        <a:srgbClr val="8D3443"/>
+                        <a:srgbClr val="E198A4"/>
                       </a:solidFill>
                       <a:prstDash val="solid"/>
                     </a:lnL>
                     <a:lnR w="9525" cap="flat" cmpd="sng" algn="ctr">
                       <a:solidFill>
-                        <a:srgbClr val="8D3443"/>
+                        <a:srgbClr val="E198A4"/>
                       </a:solidFill>
                       <a:prstDash val="solid"/>
                     </a:lnR>
                     <a:lnT w="9525" cap="flat" cmpd="sng" algn="ctr">
                       <a:solidFill>
-                        <a:srgbClr val="8D3443"/>
+                        <a:srgbClr val="E198A4"/>
                       </a:solidFill>
                       <a:prstDash val="solid"/>
                     </a:lnT>
                     <a:lnB w="9525" cap="flat" cmpd="sng" algn="ctr">
                       <a:solidFill>
-                        <a:srgbClr val="8D3443"/>
+                        <a:srgbClr val="E198A4"/>
                       </a:solidFill>
                       <a:prstDash val="solid"/>
                     </a:lnB>
                     <a:solidFill>
-                      <a:srgbClr val="8D3443"/>
+                      <a:srgbClr val="E198A4"/>
                     </a:solidFill>
                   </a:tcPr>
                 </a:tc>
@@ -5531,7 +6126,7 @@
                       <a:r>
                         <a:rPr sz="1500" b="1">
                           <a:solidFill>
-                            <a:srgbClr val="FFFFFF"/>
+                            <a:srgbClr val="26231F"/>
                           </a:solidFill>
                         </a:rPr>
                         <a:t>목표</a:t>
@@ -5541,30 +6136,30 @@
                   <a:tcPr anchor="ctr" marL="73152" marR="73152">
                     <a:lnL w="9525" cap="flat" cmpd="sng" algn="ctr">
                       <a:solidFill>
-                        <a:srgbClr val="8D3443"/>
+                        <a:srgbClr val="E198A4"/>
                       </a:solidFill>
                       <a:prstDash val="solid"/>
                     </a:lnL>
                     <a:lnR w="9525" cap="flat" cmpd="sng" algn="ctr">
                       <a:solidFill>
-                        <a:srgbClr val="8D3443"/>
+                        <a:srgbClr val="E198A4"/>
                       </a:solidFill>
                       <a:prstDash val="solid"/>
                     </a:lnR>
                     <a:lnT w="9525" cap="flat" cmpd="sng" algn="ctr">
                       <a:solidFill>
-                        <a:srgbClr val="8D3443"/>
+                        <a:srgbClr val="E198A4"/>
                       </a:solidFill>
                       <a:prstDash val="solid"/>
                     </a:lnT>
                     <a:lnB w="9525" cap="flat" cmpd="sng" algn="ctr">
                       <a:solidFill>
-                        <a:srgbClr val="8D3443"/>
+                        <a:srgbClr val="E198A4"/>
                       </a:solidFill>
                       <a:prstDash val="solid"/>
                     </a:lnB>
                     <a:solidFill>
-                      <a:srgbClr val="8D3443"/>
+                      <a:srgbClr val="E198A4"/>
                     </a:solidFill>
                   </a:tcPr>
                 </a:tc>
@@ -5577,7 +6172,7 @@
                       <a:r>
                         <a:rPr sz="1500" b="1">
                           <a:solidFill>
-                            <a:srgbClr val="FFFFFF"/>
+                            <a:srgbClr val="26231F"/>
                           </a:solidFill>
                         </a:rPr>
                         <a:t>실적</a:t>
@@ -5587,30 +6182,30 @@
                   <a:tcPr anchor="ctr" marL="73152" marR="73152">
                     <a:lnL w="9525" cap="flat" cmpd="sng" algn="ctr">
                       <a:solidFill>
-                        <a:srgbClr val="8D3443"/>
+                        <a:srgbClr val="E198A4"/>
                       </a:solidFill>
                       <a:prstDash val="solid"/>
                     </a:lnL>
                     <a:lnR w="9525" cap="flat" cmpd="sng" algn="ctr">
                       <a:solidFill>
-                        <a:srgbClr val="8D3443"/>
+                        <a:srgbClr val="E198A4"/>
                       </a:solidFill>
                       <a:prstDash val="solid"/>
                     </a:lnR>
                     <a:lnT w="9525" cap="flat" cmpd="sng" algn="ctr">
                       <a:solidFill>
-                        <a:srgbClr val="8D3443"/>
+                        <a:srgbClr val="E198A4"/>
                       </a:solidFill>
                       <a:prstDash val="solid"/>
                     </a:lnT>
                     <a:lnB w="9525" cap="flat" cmpd="sng" algn="ctr">
                       <a:solidFill>
-                        <a:srgbClr val="8D3443"/>
+                        <a:srgbClr val="E198A4"/>
                       </a:solidFill>
                       <a:prstDash val="solid"/>
                     </a:lnB>
                     <a:solidFill>
-                      <a:srgbClr val="8D3443"/>
+                      <a:srgbClr val="E198A4"/>
                     </a:solidFill>
                   </a:tcPr>
                 </a:tc>
@@ -5623,7 +6218,7 @@
                       <a:r>
                         <a:rPr sz="1500" b="1">
                           <a:solidFill>
-                            <a:srgbClr val="FFFFFF"/>
+                            <a:srgbClr val="26231F"/>
                           </a:solidFill>
                         </a:rPr>
                         <a:t>달성률</a:t>
@@ -5633,30 +6228,30 @@
                   <a:tcPr anchor="ctr" marL="73152" marR="73152">
                     <a:lnL w="9525" cap="flat" cmpd="sng" algn="ctr">
                       <a:solidFill>
-                        <a:srgbClr val="8D3443"/>
+                        <a:srgbClr val="E198A4"/>
                       </a:solidFill>
                       <a:prstDash val="solid"/>
                     </a:lnL>
                     <a:lnR w="9525" cap="flat" cmpd="sng" algn="ctr">
                       <a:solidFill>
-                        <a:srgbClr val="8D3443"/>
+                        <a:srgbClr val="E198A4"/>
                       </a:solidFill>
                       <a:prstDash val="solid"/>
                     </a:lnR>
                     <a:lnT w="9525" cap="flat" cmpd="sng" algn="ctr">
                       <a:solidFill>
-                        <a:srgbClr val="8D3443"/>
+                        <a:srgbClr val="E198A4"/>
                       </a:solidFill>
                       <a:prstDash val="solid"/>
                     </a:lnT>
                     <a:lnB w="9525" cap="flat" cmpd="sng" algn="ctr">
                       <a:solidFill>
-                        <a:srgbClr val="8D3443"/>
+                        <a:srgbClr val="E198A4"/>
                       </a:solidFill>
                       <a:prstDash val="solid"/>
                     </a:lnB>
                     <a:solidFill>
-                      <a:srgbClr val="8D3443"/>
+                      <a:srgbClr val="E198A4"/>
                     </a:solidFill>
                   </a:tcPr>
                 </a:tc>
@@ -5671,7 +6266,7 @@
                       <a:r>
                         <a:rPr sz="1500" b="1">
                           <a:solidFill>
-                            <a:srgbClr val="431920"/>
+                            <a:srgbClr val="49272D"/>
                           </a:solidFill>
                         </a:rPr>
                         <a:t>1</a:t>
@@ -5681,30 +6276,30 @@
                   <a:tcPr anchor="ctr" marL="73152" marR="73152">
                     <a:lnL w="9525" cap="flat" cmpd="sng" algn="ctr">
                       <a:solidFill>
-                        <a:srgbClr val="F0D1D6"/>
+                        <a:srgbClr val="F6D5DA"/>
                       </a:solidFill>
                       <a:prstDash val="solid"/>
                     </a:lnL>
                     <a:lnR w="9525" cap="flat" cmpd="sng" algn="ctr">
                       <a:solidFill>
-                        <a:srgbClr val="F0D1D6"/>
+                        <a:srgbClr val="F6D5DA"/>
                       </a:solidFill>
                       <a:prstDash val="solid"/>
                     </a:lnR>
                     <a:lnT w="9525" cap="flat" cmpd="sng" algn="ctr">
                       <a:solidFill>
-                        <a:srgbClr val="F0D1D6"/>
+                        <a:srgbClr val="F6D5DA"/>
                       </a:solidFill>
                       <a:prstDash val="solid"/>
                     </a:lnT>
                     <a:lnB w="9525" cap="flat" cmpd="sng" algn="ctr">
                       <a:solidFill>
-                        <a:srgbClr val="F0D1D6"/>
+                        <a:srgbClr val="F6D5DA"/>
                       </a:solidFill>
                       <a:prstDash val="solid"/>
                     </a:lnB>
                     <a:solidFill>
-                      <a:srgbClr val="F0D1D6"/>
+                      <a:srgbClr val="F6D5DA"/>
                     </a:solidFill>
                   </a:tcPr>
                 </a:tc>
@@ -5717,7 +6312,7 @@
                       <a:r>
                         <a:rPr sz="1500" b="0">
                           <a:solidFill>
-                            <a:srgbClr val="2B2B2B"/>
+                            <a:srgbClr val="26231F"/>
                           </a:solidFill>
                         </a:rPr>
                         <a:t>내용 입력</a:t>
@@ -5727,25 +6322,25 @@
                   <a:tcPr anchor="ctr" marL="73152" marR="73152">
                     <a:lnL w="9525" cap="flat" cmpd="sng" algn="ctr">
                       <a:solidFill>
-                        <a:srgbClr val="F0D1D6"/>
+                        <a:srgbClr val="F6D5DA"/>
                       </a:solidFill>
                       <a:prstDash val="solid"/>
                     </a:lnL>
                     <a:lnR w="9525" cap="flat" cmpd="sng" algn="ctr">
                       <a:solidFill>
-                        <a:srgbClr val="F0D1D6"/>
+                        <a:srgbClr val="F6D5DA"/>
                       </a:solidFill>
                       <a:prstDash val="solid"/>
                     </a:lnR>
                     <a:lnT w="9525" cap="flat" cmpd="sng" algn="ctr">
                       <a:solidFill>
-                        <a:srgbClr val="F0D1D6"/>
+                        <a:srgbClr val="F6D5DA"/>
                       </a:solidFill>
                       <a:prstDash val="solid"/>
                     </a:lnT>
                     <a:lnB w="9525" cap="flat" cmpd="sng" algn="ctr">
                       <a:solidFill>
-                        <a:srgbClr val="F0D1D6"/>
+                        <a:srgbClr val="F6D5DA"/>
                       </a:solidFill>
                       <a:prstDash val="solid"/>
                     </a:lnB>
@@ -5763,7 +6358,7 @@
                       <a:r>
                         <a:rPr sz="1500" b="0">
                           <a:solidFill>
-                            <a:srgbClr val="2B2B2B"/>
+                            <a:srgbClr val="26231F"/>
                           </a:solidFill>
                         </a:rPr>
                         <a:t/>
@@ -5773,25 +6368,25 @@
                   <a:tcPr anchor="ctr" marL="73152" marR="73152">
                     <a:lnL w="9525" cap="flat" cmpd="sng" algn="ctr">
                       <a:solidFill>
-                        <a:srgbClr val="F0D1D6"/>
+                        <a:srgbClr val="F6D5DA"/>
                       </a:solidFill>
                       <a:prstDash val="solid"/>
                     </a:lnL>
                     <a:lnR w="9525" cap="flat" cmpd="sng" algn="ctr">
                       <a:solidFill>
-                        <a:srgbClr val="F0D1D6"/>
+                        <a:srgbClr val="F6D5DA"/>
                       </a:solidFill>
                       <a:prstDash val="solid"/>
                     </a:lnR>
                     <a:lnT w="9525" cap="flat" cmpd="sng" algn="ctr">
                       <a:solidFill>
-                        <a:srgbClr val="F0D1D6"/>
+                        <a:srgbClr val="F6D5DA"/>
                       </a:solidFill>
                       <a:prstDash val="solid"/>
                     </a:lnT>
                     <a:lnB w="9525" cap="flat" cmpd="sng" algn="ctr">
                       <a:solidFill>
-                        <a:srgbClr val="F0D1D6"/>
+                        <a:srgbClr val="F6D5DA"/>
                       </a:solidFill>
                       <a:prstDash val="solid"/>
                     </a:lnB>
@@ -5809,7 +6404,7 @@
                       <a:r>
                         <a:rPr sz="1500" b="0">
                           <a:solidFill>
-                            <a:srgbClr val="2B2B2B"/>
+                            <a:srgbClr val="26231F"/>
                           </a:solidFill>
                         </a:rPr>
                         <a:t/>
@@ -5819,25 +6414,25 @@
                   <a:tcPr anchor="ctr" marL="73152" marR="73152">
                     <a:lnL w="9525" cap="flat" cmpd="sng" algn="ctr">
                       <a:solidFill>
-                        <a:srgbClr val="F0D1D6"/>
+                        <a:srgbClr val="F6D5DA"/>
                       </a:solidFill>
                       <a:prstDash val="solid"/>
                     </a:lnL>
                     <a:lnR w="9525" cap="flat" cmpd="sng" algn="ctr">
                       <a:solidFill>
-                        <a:srgbClr val="F0D1D6"/>
+                        <a:srgbClr val="F6D5DA"/>
                       </a:solidFill>
                       <a:prstDash val="solid"/>
                     </a:lnR>
                     <a:lnT w="9525" cap="flat" cmpd="sng" algn="ctr">
                       <a:solidFill>
-                        <a:srgbClr val="F0D1D6"/>
+                        <a:srgbClr val="F6D5DA"/>
                       </a:solidFill>
                       <a:prstDash val="solid"/>
                     </a:lnT>
                     <a:lnB w="9525" cap="flat" cmpd="sng" algn="ctr">
                       <a:solidFill>
-                        <a:srgbClr val="F0D1D6"/>
+                        <a:srgbClr val="F6D5DA"/>
                       </a:solidFill>
                       <a:prstDash val="solid"/>
                     </a:lnB>
@@ -5857,7 +6452,7 @@
                       <a:r>
                         <a:rPr sz="1500" b="1">
                           <a:solidFill>
-                            <a:srgbClr val="431920"/>
+                            <a:srgbClr val="49272D"/>
                           </a:solidFill>
                         </a:rPr>
                         <a:t>2</a:t>
@@ -5867,30 +6462,30 @@
                   <a:tcPr anchor="ctr" marL="73152" marR="73152">
                     <a:lnL w="9525" cap="flat" cmpd="sng" algn="ctr">
                       <a:solidFill>
-                        <a:srgbClr val="F0D1D6"/>
+                        <a:srgbClr val="F6D5DA"/>
                       </a:solidFill>
                       <a:prstDash val="solid"/>
                     </a:lnL>
                     <a:lnR w="9525" cap="flat" cmpd="sng" algn="ctr">
                       <a:solidFill>
-                        <a:srgbClr val="F0D1D6"/>
+                        <a:srgbClr val="F6D5DA"/>
                       </a:solidFill>
                       <a:prstDash val="solid"/>
                     </a:lnR>
                     <a:lnT w="9525" cap="flat" cmpd="sng" algn="ctr">
                       <a:solidFill>
-                        <a:srgbClr val="F0D1D6"/>
+                        <a:srgbClr val="F6D5DA"/>
                       </a:solidFill>
                       <a:prstDash val="solid"/>
                     </a:lnT>
                     <a:lnB w="9525" cap="flat" cmpd="sng" algn="ctr">
                       <a:solidFill>
-                        <a:srgbClr val="F0D1D6"/>
+                        <a:srgbClr val="F6D5DA"/>
                       </a:solidFill>
                       <a:prstDash val="solid"/>
                     </a:lnB>
                     <a:solidFill>
-                      <a:srgbClr val="F0D1D6"/>
+                      <a:srgbClr val="F6D5DA"/>
                     </a:solidFill>
                   </a:tcPr>
                 </a:tc>
@@ -5903,7 +6498,7 @@
                       <a:r>
                         <a:rPr sz="1500" b="0">
                           <a:solidFill>
-                            <a:srgbClr val="2B2B2B"/>
+                            <a:srgbClr val="26231F"/>
                           </a:solidFill>
                         </a:rPr>
                         <a:t>내용 입력</a:t>
@@ -5913,30 +6508,30 @@
                   <a:tcPr anchor="ctr" marL="73152" marR="73152">
                     <a:lnL w="9525" cap="flat" cmpd="sng" algn="ctr">
                       <a:solidFill>
-                        <a:srgbClr val="F0D1D6"/>
+                        <a:srgbClr val="F6D5DA"/>
                       </a:solidFill>
                       <a:prstDash val="solid"/>
                     </a:lnL>
                     <a:lnR w="9525" cap="flat" cmpd="sng" algn="ctr">
                       <a:solidFill>
-                        <a:srgbClr val="F0D1D6"/>
+                        <a:srgbClr val="F6D5DA"/>
                       </a:solidFill>
                       <a:prstDash val="solid"/>
                     </a:lnR>
                     <a:lnT w="9525" cap="flat" cmpd="sng" algn="ctr">
                       <a:solidFill>
-                        <a:srgbClr val="F0D1D6"/>
+                        <a:srgbClr val="F6D5DA"/>
                       </a:solidFill>
                       <a:prstDash val="solid"/>
                     </a:lnT>
                     <a:lnB w="9525" cap="flat" cmpd="sng" algn="ctr">
                       <a:solidFill>
-                        <a:srgbClr val="F0D1D6"/>
+                        <a:srgbClr val="F6D5DA"/>
                       </a:solidFill>
                       <a:prstDash val="solid"/>
                     </a:lnB>
                     <a:solidFill>
-                      <a:srgbClr val="F9F0F2"/>
+                      <a:srgbClr val="FBECEF"/>
                     </a:solidFill>
                   </a:tcPr>
                 </a:tc>
@@ -5949,7 +6544,7 @@
                       <a:r>
                         <a:rPr sz="1500" b="0">
                           <a:solidFill>
-                            <a:srgbClr val="2B2B2B"/>
+                            <a:srgbClr val="26231F"/>
                           </a:solidFill>
                         </a:rPr>
                         <a:t/>
@@ -5959,30 +6554,30 @@
                   <a:tcPr anchor="ctr" marL="73152" marR="73152">
                     <a:lnL w="9525" cap="flat" cmpd="sng" algn="ctr">
                       <a:solidFill>
-                        <a:srgbClr val="F0D1D6"/>
+                        <a:srgbClr val="F6D5DA"/>
                       </a:solidFill>
                       <a:prstDash val="solid"/>
                     </a:lnL>
                     <a:lnR w="9525" cap="flat" cmpd="sng" algn="ctr">
                       <a:solidFill>
-                        <a:srgbClr val="F0D1D6"/>
+                        <a:srgbClr val="F6D5DA"/>
                       </a:solidFill>
                       <a:prstDash val="solid"/>
                     </a:lnR>
                     <a:lnT w="9525" cap="flat" cmpd="sng" algn="ctr">
                       <a:solidFill>
-                        <a:srgbClr val="F0D1D6"/>
+                        <a:srgbClr val="F6D5DA"/>
                       </a:solidFill>
                       <a:prstDash val="solid"/>
                     </a:lnT>
                     <a:lnB w="9525" cap="flat" cmpd="sng" algn="ctr">
                       <a:solidFill>
-                        <a:srgbClr val="F0D1D6"/>
+                        <a:srgbClr val="F6D5DA"/>
                       </a:solidFill>
                       <a:prstDash val="solid"/>
                     </a:lnB>
                     <a:solidFill>
-                      <a:srgbClr val="F9F0F2"/>
+                      <a:srgbClr val="FBECEF"/>
                     </a:solidFill>
                   </a:tcPr>
                 </a:tc>
@@ -5995,7 +6590,7 @@
                       <a:r>
                         <a:rPr sz="1500" b="0">
                           <a:solidFill>
-                            <a:srgbClr val="2B2B2B"/>
+                            <a:srgbClr val="26231F"/>
                           </a:solidFill>
                         </a:rPr>
                         <a:t/>
@@ -6005,30 +6600,30 @@
                   <a:tcPr anchor="ctr" marL="73152" marR="73152">
                     <a:lnL w="9525" cap="flat" cmpd="sng" algn="ctr">
                       <a:solidFill>
-                        <a:srgbClr val="F0D1D6"/>
+                        <a:srgbClr val="F6D5DA"/>
                       </a:solidFill>
                       <a:prstDash val="solid"/>
                     </a:lnL>
                     <a:lnR w="9525" cap="flat" cmpd="sng" algn="ctr">
                       <a:solidFill>
-                        <a:srgbClr val="F0D1D6"/>
+                        <a:srgbClr val="F6D5DA"/>
                       </a:solidFill>
                       <a:prstDash val="solid"/>
                     </a:lnR>
                     <a:lnT w="9525" cap="flat" cmpd="sng" algn="ctr">
                       <a:solidFill>
-                        <a:srgbClr val="F0D1D6"/>
+                        <a:srgbClr val="F6D5DA"/>
                       </a:solidFill>
                       <a:prstDash val="solid"/>
                     </a:lnT>
                     <a:lnB w="9525" cap="flat" cmpd="sng" algn="ctr">
                       <a:solidFill>
-                        <a:srgbClr val="F0D1D6"/>
+                        <a:srgbClr val="F6D5DA"/>
                       </a:solidFill>
                       <a:prstDash val="solid"/>
                     </a:lnB>
                     <a:solidFill>
-                      <a:srgbClr val="F9F0F2"/>
+                      <a:srgbClr val="FBECEF"/>
                     </a:solidFill>
                   </a:tcPr>
                 </a:tc>
@@ -6043,7 +6638,7 @@
                       <a:r>
                         <a:rPr sz="1500" b="1">
                           <a:solidFill>
-                            <a:srgbClr val="431920"/>
+                            <a:srgbClr val="49272D"/>
                           </a:solidFill>
                         </a:rPr>
                         <a:t>3</a:t>
@@ -6053,30 +6648,30 @@
                   <a:tcPr anchor="ctr" marL="73152" marR="73152">
                     <a:lnL w="9525" cap="flat" cmpd="sng" algn="ctr">
                       <a:solidFill>
-                        <a:srgbClr val="F0D1D6"/>
+                        <a:srgbClr val="F6D5DA"/>
                       </a:solidFill>
                       <a:prstDash val="solid"/>
                     </a:lnL>
                     <a:lnR w="9525" cap="flat" cmpd="sng" algn="ctr">
                       <a:solidFill>
-                        <a:srgbClr val="F0D1D6"/>
+                        <a:srgbClr val="F6D5DA"/>
                       </a:solidFill>
                       <a:prstDash val="solid"/>
                     </a:lnR>
                     <a:lnT w="9525" cap="flat" cmpd="sng" algn="ctr">
                       <a:solidFill>
-                        <a:srgbClr val="F0D1D6"/>
+                        <a:srgbClr val="F6D5DA"/>
                       </a:solidFill>
                       <a:prstDash val="solid"/>
                     </a:lnT>
                     <a:lnB w="9525" cap="flat" cmpd="sng" algn="ctr">
                       <a:solidFill>
-                        <a:srgbClr val="F0D1D6"/>
+                        <a:srgbClr val="F6D5DA"/>
                       </a:solidFill>
                       <a:prstDash val="solid"/>
                     </a:lnB>
                     <a:solidFill>
-                      <a:srgbClr val="F0D1D6"/>
+                      <a:srgbClr val="F6D5DA"/>
                     </a:solidFill>
                   </a:tcPr>
                 </a:tc>
@@ -6089,7 +6684,7 @@
                       <a:r>
                         <a:rPr sz="1500" b="0">
                           <a:solidFill>
-                            <a:srgbClr val="2B2B2B"/>
+                            <a:srgbClr val="26231F"/>
                           </a:solidFill>
                         </a:rPr>
                         <a:t>내용 입력</a:t>
@@ -6099,25 +6694,25 @@
                   <a:tcPr anchor="ctr" marL="73152" marR="73152">
                     <a:lnL w="9525" cap="flat" cmpd="sng" algn="ctr">
                       <a:solidFill>
-                        <a:srgbClr val="F0D1D6"/>
+                        <a:srgbClr val="F6D5DA"/>
                       </a:solidFill>
                       <a:prstDash val="solid"/>
                     </a:lnL>
                     <a:lnR w="9525" cap="flat" cmpd="sng" algn="ctr">
                       <a:solidFill>
-                        <a:srgbClr val="F0D1D6"/>
+                        <a:srgbClr val="F6D5DA"/>
                       </a:solidFill>
                       <a:prstDash val="solid"/>
                     </a:lnR>
                     <a:lnT w="9525" cap="flat" cmpd="sng" algn="ctr">
                       <a:solidFill>
-                        <a:srgbClr val="F0D1D6"/>
+                        <a:srgbClr val="F6D5DA"/>
                       </a:solidFill>
                       <a:prstDash val="solid"/>
                     </a:lnT>
                     <a:lnB w="9525" cap="flat" cmpd="sng" algn="ctr">
                       <a:solidFill>
-                        <a:srgbClr val="F0D1D6"/>
+                        <a:srgbClr val="F6D5DA"/>
                       </a:solidFill>
                       <a:prstDash val="solid"/>
                     </a:lnB>
@@ -6135,7 +6730,7 @@
                       <a:r>
                         <a:rPr sz="1500" b="0">
                           <a:solidFill>
-                            <a:srgbClr val="2B2B2B"/>
+                            <a:srgbClr val="26231F"/>
                           </a:solidFill>
                         </a:rPr>
                         <a:t/>
@@ -6145,25 +6740,25 @@
                   <a:tcPr anchor="ctr" marL="73152" marR="73152">
                     <a:lnL w="9525" cap="flat" cmpd="sng" algn="ctr">
                       <a:solidFill>
-                        <a:srgbClr val="F0D1D6"/>
+                        <a:srgbClr val="F6D5DA"/>
                       </a:solidFill>
                       <a:prstDash val="solid"/>
                     </a:lnL>
                     <a:lnR w="9525" cap="flat" cmpd="sng" algn="ctr">
                       <a:solidFill>
-                        <a:srgbClr val="F0D1D6"/>
+                        <a:srgbClr val="F6D5DA"/>
                       </a:solidFill>
                       <a:prstDash val="solid"/>
                     </a:lnR>
                     <a:lnT w="9525" cap="flat" cmpd="sng" algn="ctr">
                       <a:solidFill>
-                        <a:srgbClr val="F0D1D6"/>
+                        <a:srgbClr val="F6D5DA"/>
                       </a:solidFill>
                       <a:prstDash val="solid"/>
                     </a:lnT>
                     <a:lnB w="9525" cap="flat" cmpd="sng" algn="ctr">
                       <a:solidFill>
-                        <a:srgbClr val="F0D1D6"/>
+                        <a:srgbClr val="F6D5DA"/>
                       </a:solidFill>
                       <a:prstDash val="solid"/>
                     </a:lnB>
@@ -6181,7 +6776,7 @@
                       <a:r>
                         <a:rPr sz="1500" b="0">
                           <a:solidFill>
-                            <a:srgbClr val="2B2B2B"/>
+                            <a:srgbClr val="26231F"/>
                           </a:solidFill>
                         </a:rPr>
                         <a:t/>
@@ -6191,25 +6786,25 @@
                   <a:tcPr anchor="ctr" marL="73152" marR="73152">
                     <a:lnL w="9525" cap="flat" cmpd="sng" algn="ctr">
                       <a:solidFill>
-                        <a:srgbClr val="F0D1D6"/>
+                        <a:srgbClr val="F6D5DA"/>
                       </a:solidFill>
                       <a:prstDash val="solid"/>
                     </a:lnL>
                     <a:lnR w="9525" cap="flat" cmpd="sng" algn="ctr">
                       <a:solidFill>
-                        <a:srgbClr val="F0D1D6"/>
+                        <a:srgbClr val="F6D5DA"/>
                       </a:solidFill>
                       <a:prstDash val="solid"/>
                     </a:lnR>
                     <a:lnT w="9525" cap="flat" cmpd="sng" algn="ctr">
                       <a:solidFill>
-                        <a:srgbClr val="F0D1D6"/>
+                        <a:srgbClr val="F6D5DA"/>
                       </a:solidFill>
                       <a:prstDash val="solid"/>
                     </a:lnT>
                     <a:lnB w="9525" cap="flat" cmpd="sng" algn="ctr">
                       <a:solidFill>
-                        <a:srgbClr val="F0D1D6"/>
+                        <a:srgbClr val="F6D5DA"/>
                       </a:solidFill>
                       <a:prstDash val="solid"/>
                     </a:lnB>
@@ -6229,7 +6824,7 @@
                       <a:r>
                         <a:rPr sz="1500" b="1">
                           <a:solidFill>
-                            <a:srgbClr val="431920"/>
+                            <a:srgbClr val="49272D"/>
                           </a:solidFill>
                         </a:rPr>
                         <a:t>4</a:t>
@@ -6239,30 +6834,30 @@
                   <a:tcPr anchor="ctr" marL="73152" marR="73152">
                     <a:lnL w="9525" cap="flat" cmpd="sng" algn="ctr">
                       <a:solidFill>
-                        <a:srgbClr val="F0D1D6"/>
+                        <a:srgbClr val="F6D5DA"/>
                       </a:solidFill>
                       <a:prstDash val="solid"/>
                     </a:lnL>
                     <a:lnR w="9525" cap="flat" cmpd="sng" algn="ctr">
                       <a:solidFill>
-                        <a:srgbClr val="F0D1D6"/>
+                        <a:srgbClr val="F6D5DA"/>
                       </a:solidFill>
                       <a:prstDash val="solid"/>
                     </a:lnR>
                     <a:lnT w="9525" cap="flat" cmpd="sng" algn="ctr">
                       <a:solidFill>
-                        <a:srgbClr val="F0D1D6"/>
+                        <a:srgbClr val="F6D5DA"/>
                       </a:solidFill>
                       <a:prstDash val="solid"/>
                     </a:lnT>
                     <a:lnB w="9525" cap="flat" cmpd="sng" algn="ctr">
                       <a:solidFill>
-                        <a:srgbClr val="F0D1D6"/>
+                        <a:srgbClr val="F6D5DA"/>
                       </a:solidFill>
                       <a:prstDash val="solid"/>
                     </a:lnB>
                     <a:solidFill>
-                      <a:srgbClr val="F0D1D6"/>
+                      <a:srgbClr val="F6D5DA"/>
                     </a:solidFill>
                   </a:tcPr>
                 </a:tc>
@@ -6275,7 +6870,7 @@
                       <a:r>
                         <a:rPr sz="1500" b="0">
                           <a:solidFill>
-                            <a:srgbClr val="2B2B2B"/>
+                            <a:srgbClr val="26231F"/>
                           </a:solidFill>
                         </a:rPr>
                         <a:t>내용 입력</a:t>
@@ -6285,30 +6880,30 @@
                   <a:tcPr anchor="ctr" marL="73152" marR="73152">
                     <a:lnL w="9525" cap="flat" cmpd="sng" algn="ctr">
                       <a:solidFill>
-                        <a:srgbClr val="F0D1D6"/>
+                        <a:srgbClr val="F6D5DA"/>
                       </a:solidFill>
                       <a:prstDash val="solid"/>
                     </a:lnL>
                     <a:lnR w="9525" cap="flat" cmpd="sng" algn="ctr">
                       <a:solidFill>
-                        <a:srgbClr val="F0D1D6"/>
+                        <a:srgbClr val="F6D5DA"/>
                       </a:solidFill>
                       <a:prstDash val="solid"/>
                     </a:lnR>
                     <a:lnT w="9525" cap="flat" cmpd="sng" algn="ctr">
                       <a:solidFill>
-                        <a:srgbClr val="F0D1D6"/>
+                        <a:srgbClr val="F6D5DA"/>
                       </a:solidFill>
                       <a:prstDash val="solid"/>
                     </a:lnT>
                     <a:lnB w="9525" cap="flat" cmpd="sng" algn="ctr">
                       <a:solidFill>
-                        <a:srgbClr val="F0D1D6"/>
+                        <a:srgbClr val="F6D5DA"/>
                       </a:solidFill>
                       <a:prstDash val="solid"/>
                     </a:lnB>
                     <a:solidFill>
-                      <a:srgbClr val="F9F0F2"/>
+                      <a:srgbClr val="FBECEF"/>
                     </a:solidFill>
                   </a:tcPr>
                 </a:tc>
@@ -6321,7 +6916,7 @@
                       <a:r>
                         <a:rPr sz="1500" b="0">
                           <a:solidFill>
-                            <a:srgbClr val="2B2B2B"/>
+                            <a:srgbClr val="26231F"/>
                           </a:solidFill>
                         </a:rPr>
                         <a:t/>
@@ -6331,30 +6926,30 @@
                   <a:tcPr anchor="ctr" marL="73152" marR="73152">
                     <a:lnL w="9525" cap="flat" cmpd="sng" algn="ctr">
                       <a:solidFill>
-                        <a:srgbClr val="F0D1D6"/>
+                        <a:srgbClr val="F6D5DA"/>
                       </a:solidFill>
                       <a:prstDash val="solid"/>
                     </a:lnL>
                     <a:lnR w="9525" cap="flat" cmpd="sng" algn="ctr">
                       <a:solidFill>
-                        <a:srgbClr val="F0D1D6"/>
+                        <a:srgbClr val="F6D5DA"/>
                       </a:solidFill>
                       <a:prstDash val="solid"/>
                     </a:lnR>
                     <a:lnT w="9525" cap="flat" cmpd="sng" algn="ctr">
                       <a:solidFill>
-                        <a:srgbClr val="F0D1D6"/>
+                        <a:srgbClr val="F6D5DA"/>
                       </a:solidFill>
                       <a:prstDash val="solid"/>
                     </a:lnT>
                     <a:lnB w="9525" cap="flat" cmpd="sng" algn="ctr">
                       <a:solidFill>
-                        <a:srgbClr val="F0D1D6"/>
+                        <a:srgbClr val="F6D5DA"/>
                       </a:solidFill>
                       <a:prstDash val="solid"/>
                     </a:lnB>
                     <a:solidFill>
-                      <a:srgbClr val="F9F0F2"/>
+                      <a:srgbClr val="FBECEF"/>
                     </a:solidFill>
                   </a:tcPr>
                 </a:tc>
@@ -6367,7 +6962,7 @@
                       <a:r>
                         <a:rPr sz="1500" b="0">
                           <a:solidFill>
-                            <a:srgbClr val="2B2B2B"/>
+                            <a:srgbClr val="26231F"/>
                           </a:solidFill>
                         </a:rPr>
                         <a:t/>
@@ -6377,30 +6972,30 @@
                   <a:tcPr anchor="ctr" marL="73152" marR="73152">
                     <a:lnL w="9525" cap="flat" cmpd="sng" algn="ctr">
                       <a:solidFill>
-                        <a:srgbClr val="F0D1D6"/>
+                        <a:srgbClr val="F6D5DA"/>
                       </a:solidFill>
                       <a:prstDash val="solid"/>
                     </a:lnL>
                     <a:lnR w="9525" cap="flat" cmpd="sng" algn="ctr">
                       <a:solidFill>
-                        <a:srgbClr val="F0D1D6"/>
+                        <a:srgbClr val="F6D5DA"/>
                       </a:solidFill>
                       <a:prstDash val="solid"/>
                     </a:lnR>
                     <a:lnT w="9525" cap="flat" cmpd="sng" algn="ctr">
                       <a:solidFill>
-                        <a:srgbClr val="F0D1D6"/>
+                        <a:srgbClr val="F6D5DA"/>
                       </a:solidFill>
                       <a:prstDash val="solid"/>
                     </a:lnT>
                     <a:lnB w="9525" cap="flat" cmpd="sng" algn="ctr">
                       <a:solidFill>
-                        <a:srgbClr val="F0D1D6"/>
+                        <a:srgbClr val="F6D5DA"/>
                       </a:solidFill>
                       <a:prstDash val="solid"/>
                     </a:lnB>
                     <a:solidFill>
-                      <a:srgbClr val="F9F0F2"/>
+                      <a:srgbClr val="FBECEF"/>
                     </a:solidFill>
                   </a:tcPr>
                 </a:tc>
@@ -6415,7 +7010,7 @@
                       <a:r>
                         <a:rPr sz="1500" b="1">
                           <a:solidFill>
-                            <a:srgbClr val="431920"/>
+                            <a:srgbClr val="49272D"/>
                           </a:solidFill>
                         </a:rPr>
                         <a:t>5</a:t>
@@ -6425,30 +7020,30 @@
                   <a:tcPr anchor="ctr" marL="73152" marR="73152">
                     <a:lnL w="9525" cap="flat" cmpd="sng" algn="ctr">
                       <a:solidFill>
-                        <a:srgbClr val="F0D1D6"/>
+                        <a:srgbClr val="F6D5DA"/>
                       </a:solidFill>
                       <a:prstDash val="solid"/>
                     </a:lnL>
                     <a:lnR w="9525" cap="flat" cmpd="sng" algn="ctr">
                       <a:solidFill>
-                        <a:srgbClr val="F0D1D6"/>
+                        <a:srgbClr val="F6D5DA"/>
                       </a:solidFill>
                       <a:prstDash val="solid"/>
                     </a:lnR>
                     <a:lnT w="9525" cap="flat" cmpd="sng" algn="ctr">
                       <a:solidFill>
-                        <a:srgbClr val="F0D1D6"/>
+                        <a:srgbClr val="F6D5DA"/>
                       </a:solidFill>
                       <a:prstDash val="solid"/>
                     </a:lnT>
                     <a:lnB w="9525" cap="flat" cmpd="sng" algn="ctr">
                       <a:solidFill>
-                        <a:srgbClr val="F0D1D6"/>
+                        <a:srgbClr val="F6D5DA"/>
                       </a:solidFill>
                       <a:prstDash val="solid"/>
                     </a:lnB>
                     <a:solidFill>
-                      <a:srgbClr val="F0D1D6"/>
+                      <a:srgbClr val="F6D5DA"/>
                     </a:solidFill>
                   </a:tcPr>
                 </a:tc>
@@ -6461,7 +7056,7 @@
                       <a:r>
                         <a:rPr sz="1500" b="0">
                           <a:solidFill>
-                            <a:srgbClr val="2B2B2B"/>
+                            <a:srgbClr val="26231F"/>
                           </a:solidFill>
                         </a:rPr>
                         <a:t>내용 입력</a:t>
@@ -6471,25 +7066,25 @@
                   <a:tcPr anchor="ctr" marL="73152" marR="73152">
                     <a:lnL w="9525" cap="flat" cmpd="sng" algn="ctr">
                       <a:solidFill>
-                        <a:srgbClr val="F0D1D6"/>
+                        <a:srgbClr val="F6D5DA"/>
                       </a:solidFill>
                       <a:prstDash val="solid"/>
                     </a:lnL>
                     <a:lnR w="9525" cap="flat" cmpd="sng" algn="ctr">
                       <a:solidFill>
-                        <a:srgbClr val="F0D1D6"/>
+                        <a:srgbClr val="F6D5DA"/>
                       </a:solidFill>
                       <a:prstDash val="solid"/>
                     </a:lnR>
                     <a:lnT w="9525" cap="flat" cmpd="sng" algn="ctr">
                       <a:solidFill>
-                        <a:srgbClr val="F0D1D6"/>
+                        <a:srgbClr val="F6D5DA"/>
                       </a:solidFill>
                       <a:prstDash val="solid"/>
                     </a:lnT>
                     <a:lnB w="9525" cap="flat" cmpd="sng" algn="ctr">
                       <a:solidFill>
-                        <a:srgbClr val="F0D1D6"/>
+                        <a:srgbClr val="F6D5DA"/>
                       </a:solidFill>
                       <a:prstDash val="solid"/>
                     </a:lnB>
@@ -6507,7 +7102,7 @@
                       <a:r>
                         <a:rPr sz="1500" b="0">
                           <a:solidFill>
-                            <a:srgbClr val="2B2B2B"/>
+                            <a:srgbClr val="26231F"/>
                           </a:solidFill>
                         </a:rPr>
                         <a:t/>
@@ -6517,25 +7112,25 @@
                   <a:tcPr anchor="ctr" marL="73152" marR="73152">
                     <a:lnL w="9525" cap="flat" cmpd="sng" algn="ctr">
                       <a:solidFill>
-                        <a:srgbClr val="F0D1D6"/>
+                        <a:srgbClr val="F6D5DA"/>
                       </a:solidFill>
                       <a:prstDash val="solid"/>
                     </a:lnL>
                     <a:lnR w="9525" cap="flat" cmpd="sng" algn="ctr">
                       <a:solidFill>
-                        <a:srgbClr val="F0D1D6"/>
+                        <a:srgbClr val="F6D5DA"/>
                       </a:solidFill>
                       <a:prstDash val="solid"/>
                     </a:lnR>
                     <a:lnT w="9525" cap="flat" cmpd="sng" algn="ctr">
                       <a:solidFill>
-                        <a:srgbClr val="F0D1D6"/>
+                        <a:srgbClr val="F6D5DA"/>
                       </a:solidFill>
                       <a:prstDash val="solid"/>
                     </a:lnT>
                     <a:lnB w="9525" cap="flat" cmpd="sng" algn="ctr">
                       <a:solidFill>
-                        <a:srgbClr val="F0D1D6"/>
+                        <a:srgbClr val="F6D5DA"/>
                       </a:solidFill>
                       <a:prstDash val="solid"/>
                     </a:lnB>
@@ -6553,7 +7148,7 @@
                       <a:r>
                         <a:rPr sz="1500" b="0">
                           <a:solidFill>
-                            <a:srgbClr val="2B2B2B"/>
+                            <a:srgbClr val="26231F"/>
                           </a:solidFill>
                         </a:rPr>
                         <a:t/>
@@ -6563,25 +7158,25 @@
                   <a:tcPr anchor="ctr" marL="73152" marR="73152">
                     <a:lnL w="9525" cap="flat" cmpd="sng" algn="ctr">
                       <a:solidFill>
-                        <a:srgbClr val="F0D1D6"/>
+                        <a:srgbClr val="F6D5DA"/>
                       </a:solidFill>
                       <a:prstDash val="solid"/>
                     </a:lnL>
                     <a:lnR w="9525" cap="flat" cmpd="sng" algn="ctr">
                       <a:solidFill>
-                        <a:srgbClr val="F0D1D6"/>
+                        <a:srgbClr val="F6D5DA"/>
                       </a:solidFill>
                       <a:prstDash val="solid"/>
                     </a:lnR>
                     <a:lnT w="9525" cap="flat" cmpd="sng" algn="ctr">
                       <a:solidFill>
-                        <a:srgbClr val="F0D1D6"/>
+                        <a:srgbClr val="F6D5DA"/>
                       </a:solidFill>
                       <a:prstDash val="solid"/>
                     </a:lnT>
                     <a:lnB w="9525" cap="flat" cmpd="sng" algn="ctr">
                       <a:solidFill>
-                        <a:srgbClr val="F0D1D6"/>
+                        <a:srgbClr val="F6D5DA"/>
                       </a:solidFill>
                       <a:prstDash val="solid"/>
                     </a:lnB>
@@ -6606,6 +7201,14 @@
 <file path=ppt/slides/slide6.xml><?xml version="1.0" encoding="utf-8"?>
 <p:sld xmlns:a="http://schemas.openxmlformats.org/drawingml/2006/main" xmlns:p="http://schemas.openxmlformats.org/presentationml/2006/main" xmlns:r="http://schemas.openxmlformats.org/officeDocument/2006/relationships">
   <p:cSld>
+    <p:bg>
+      <p:bgPr>
+        <a:solidFill>
+          <a:srgbClr val="F6D5DA"/>
+        </a:solidFill>
+        <a:effectLst/>
+      </p:bgPr>
+    </p:bg>
     <p:spTree>
       <p:nvGrpSpPr>
         <p:cNvPr id="1" name=""/>
@@ -6613,30 +7216,106 @@
         <p:nvPr/>
       </p:nvGrpSpPr>
       <p:grpSpPr/>
-      <p:pic>
-        <p:nvPicPr>
-          <p:cNvPr id="3" name="표지 그림" descr="talk-43.jpg"/>
-          <p:cNvPicPr>
-            <a:picLocks noChangeAspect="1"/>
-          </p:cNvPicPr>
+      <p:sp>
+        <p:nvSpPr>
+          <p:cNvPr id="3" name="장식"/>
+          <p:cNvSpPr/>
           <p:nvPr/>
-        </p:nvPicPr>
-        <p:blipFill>
-          <a:blip r:embed="rId2"/>
-          <a:stretch>
-            <a:fillRect/>
-          </a:stretch>
-        </p:blipFill>
-        <p:spPr>
-          <a:xfrm>
-            <a:off x="0" y="0"/>
-            <a:ext cx="12191695" cy="6858000"/>
+        </p:nvSpPr>
+        <p:spPr>
+          <a:xfrm>
+            <a:off x="7071183" y="960120"/>
+            <a:ext cx="3657508" cy="4526280"/>
+          </a:xfrm>
+          <a:prstGeom prst="roundRect">
+            <a:avLst>
+              <a:gd name="adj" fmla="val 4000"/>
+            </a:avLst>
+          </a:prstGeom>
+          <a:solidFill>
+            <a:srgbClr val="FFFFFF"/>
+          </a:solidFill>
+          <a:ln>
+            <a:noFill/>
+          </a:ln>
+        </p:spPr>
+        <p:txBody>
+          <a:bodyPr rtlCol="0" anchor="ctr"/>
+          <a:lstStyle/>
+          <a:p>
+            <a:pPr algn="ctr"/>
+          </a:p>
+        </p:txBody>
+      </p:sp>
+      <p:sp>
+        <p:nvSpPr>
+          <p:cNvPr id="4" name="장식"/>
+          <p:cNvSpPr/>
+          <p:nvPr/>
+        </p:nvSpPr>
+        <p:spPr>
+          <a:xfrm>
+            <a:off x="7558851" y="1234439"/>
+            <a:ext cx="3657508" cy="4526280"/>
+          </a:xfrm>
+          <a:prstGeom prst="roundRect">
+            <a:avLst>
+              <a:gd name="adj" fmla="val 4000"/>
+            </a:avLst>
+          </a:prstGeom>
+          <a:noFill/>
+          <a:ln w="9525">
+            <a:solidFill>
+              <a:srgbClr val="26231F"/>
+            </a:solidFill>
+          </a:ln>
+        </p:spPr>
+        <p:txBody>
+          <a:bodyPr rtlCol="0" anchor="ctr"/>
+          <a:lstStyle/>
+          <a:p>
+            <a:pPr algn="ctr"/>
+          </a:p>
+        </p:txBody>
+      </p:sp>
+      <p:sp>
+        <p:nvSpPr>
+          <p:cNvPr id="5" name="라벨"/>
+          <p:cNvSpPr txBox="1"/>
+          <p:nvPr/>
+        </p:nvSpPr>
+        <p:spPr>
+          <a:xfrm>
+            <a:off x="822960" y="2148840"/>
+            <a:ext cx="5608179" cy="274320"/>
           </a:xfrm>
           <a:prstGeom prst="rect">
             <a:avLst/>
           </a:prstGeom>
-        </p:spPr>
-      </p:pic>
+          <a:noFill/>
+        </p:spPr>
+        <p:txBody>
+          <a:bodyPr wrap="square" lIns="54864" rIns="54864" tIns="27432" bIns="27432" anchor="t">
+            <a:noAutofit/>
+          </a:bodyPr>
+          <a:lstStyle/>
+          <a:p>
+            <a:pPr algn="l">
+              <a:lnSpc>
+                <a:spcPct val="115000"/>
+              </a:lnSpc>
+            </a:pPr>
+            <a:r>
+              <a:rPr sz="1000" b="1" i="0" spc="250">
+                <a:solidFill>
+                  <a:srgbClr val="26231F"/>
+                </a:solidFill>
+              </a:rPr>
+              <a:t>PRESENTATION</a:t>
+            </a:r>
+          </a:p>
+        </p:txBody>
+      </p:sp>
       <p:sp>
         <p:nvSpPr>
           <p:cNvPr id="2" name="Title 1"/>
@@ -6649,8 +7328,8 @@
         </p:nvSpPr>
         <p:spPr>
           <a:xfrm>
-            <a:off x="853418" y="2057400"/>
-            <a:ext cx="6095847" cy="1554480"/>
+            <a:off x="822960" y="2606040"/>
+            <a:ext cx="5608179" cy="1188720"/>
           </a:xfrm>
         </p:spPr>
         <p:txBody>
@@ -6665,9 +7344,9 @@
               </a:lnSpc>
             </a:pPr>
             <a:r>
-              <a:rPr sz="3600" b="1" i="0">
+              <a:rPr sz="4000" b="1" i="0">
                 <a:solidFill>
-                  <a:srgbClr val="431920"/>
+                  <a:srgbClr val="26231F"/>
                 </a:solidFill>
               </a:rPr>
               <a:t>감사합니다</a:t>
@@ -6677,14 +7356,14 @@
       </p:sp>
       <p:sp>
         <p:nvSpPr>
-          <p:cNvPr id="4" name="한 줄 문구"/>
+          <p:cNvPr id="6" name="한 줄 문구"/>
           <p:cNvSpPr txBox="1"/>
           <p:nvPr/>
         </p:nvSpPr>
         <p:spPr>
           <a:xfrm>
-            <a:off x="853418" y="3749039"/>
-            <a:ext cx="6095847" cy="822960"/>
+            <a:off x="822960" y="3886200"/>
+            <a:ext cx="5608179" cy="822960"/>
           </a:xfrm>
           <a:prstGeom prst="rect">
             <a:avLst/>
@@ -6703,9 +7382,9 @@
               </a:lnSpc>
             </a:pPr>
             <a:r>
-              <a:rPr sz="1700" b="0" i="1">
+              <a:rPr sz="1700" b="0" i="0">
                 <a:solidFill>
-                  <a:srgbClr val="431920"/>
+                  <a:srgbClr val="26231F"/>
                 </a:solidFill>
               </a:rPr>
               <a:t>끝까지 들어 주셔서 고맙습니다</a:t>
@@ -6715,14 +7394,14 @@
       </p:sp>
       <p:sp>
         <p:nvSpPr>
-          <p:cNvPr id="5" name="안내 문구"/>
+          <p:cNvPr id="7" name="안내 문구"/>
           <p:cNvSpPr txBox="1"/>
           <p:nvPr/>
         </p:nvSpPr>
         <p:spPr>
           <a:xfrm>
-            <a:off x="853418" y="4617720"/>
-            <a:ext cx="6095847" cy="914400"/>
+            <a:off x="822960" y="4754880"/>
+            <a:ext cx="5608179" cy="914400"/>
           </a:xfrm>
           <a:prstGeom prst="rect">
             <a:avLst/>
@@ -6743,7 +7422,7 @@
             <a:r>
               <a:rPr sz="1400" b="0" i="0">
                 <a:solidFill>
-                  <a:srgbClr val="666666"/>
+                  <a:srgbClr val="26231F"/>
                 </a:solidFill>
               </a:rPr>
               <a:t>문의 · 연락처를 입력하세요</a:t>
@@ -6770,34 +7449,34 @@
         <a:sysClr val="window" lastClr="FFFFFF"/>
       </a:lt1>
       <a:dk2>
-        <a:srgbClr val="431920"/>
+        <a:srgbClr val="49272D"/>
       </a:dk2>
       <a:lt2>
-        <a:srgbClr val="F9F0F2"/>
+        <a:srgbClr val="FBECEF"/>
       </a:lt2>
       <a:accent1>
-        <a:srgbClr val="8D3443"/>
+        <a:srgbClr val="E198A4"/>
       </a:accent1>
       <a:accent2>
-        <a:srgbClr val="3B9158"/>
+        <a:srgbClr val="EAC7B8"/>
       </a:accent2>
       <a:accent3>
-        <a:srgbClr val="431920"/>
+        <a:srgbClr val="49272D"/>
       </a:accent3>
       <a:accent4>
-        <a:srgbClr val="F0D1D6"/>
+        <a:srgbClr val="F6D5DA"/>
       </a:accent4>
       <a:accent5>
-        <a:srgbClr val="64624E"/>
+        <a:srgbClr val="E6B0AE"/>
       </a:accent5>
       <a:accent6>
-        <a:srgbClr val="8E7579"/>
+        <a:srgbClr val="927D81"/>
       </a:accent6>
       <a:hlink>
-        <a:srgbClr val="8D3443"/>
+        <a:srgbClr val="E198A4"/>
       </a:hlink>
       <a:folHlink>
-        <a:srgbClr val="431920"/>
+        <a:srgbClr val="49272D"/>
       </a:folHlink>
     </a:clrScheme>
     <a:fontScheme name="Office">
